--- a/en/slides/04-Computer_Architecture-Digital_Information.pptx
+++ b/en/slides/04-Computer_Architecture-Digital_Information.pptx
@@ -126,13 +126,13 @@
   <p:extLst>
     <p:ext uri="{521415D9-36F7-43E2-AB2F-B90AF26B5E84}">
       <p14:sectionLst xmlns:p14="http://schemas.microsoft.com/office/powerpoint/2010/main">
-        <p14:section name="Opening" id="{19e192f1-ac22-5ac5-1171-f1a72edb2bf3}">
+        <p14:section name="Opening" id="{d5bb5230-8c9b-2b98-0c63-d19a286ff424}">
           <p14:sldIdLst>
             <p14:sldId id="256"/>
             <p14:sldId id="257"/>
           </p14:sldIdLst>
         </p14:section>
-        <p14:section name="Information" id="{cd0a08d9-a341-6ed9-3d65-95d0849818ff}">
+        <p14:section name="Information" id="{49f7cfee-bd13-00e4-959f-32c188d7ba4d}">
           <p14:sldIdLst>
             <p14:sldId id="258"/>
             <p14:sldId id="259"/>
@@ -142,7 +142,7 @@
             <p14:sldId id="263"/>
           </p14:sldIdLst>
         </p14:section>
-        <p14:section name="Text" id="{c9875d28-5872-7e37-74be-2ad26d4fa133}">
+        <p14:section name="Text" id="{fa8d7487-c233-c91d-2e18-ce95979ca49f}">
           <p14:sldIdLst>
             <p14:sldId id="264"/>
             <p14:sldId id="265"/>
@@ -150,12 +150,12 @@
             <p14:sldId id="267"/>
           </p14:sldIdLst>
         </p14:section>
-        <p14:section name="Data structures" id="{977024b7-923d-70a5-5a56-69245a8ae241}">
+        <p14:section name="Data structures" id="{e2811c50-2fd5-358d-38a3-f3d35e6fea74}">
           <p14:sldIdLst>
             <p14:sldId id="268"/>
           </p14:sldIdLst>
         </p14:section>
-        <p14:section name="Data and algorithms" id="{0efab76a-7cef-5741-3c8c-30e5c5708726}">
+        <p14:section name="Data and algorithms" id="{ddd8e2fa-135f-e279-127b-7601e2e02901}">
           <p14:sldIdLst>
             <p14:sldId id="269"/>
             <p14:sldId id="270"/>
@@ -571,6 +571,8 @@
             <a:r>
               <a:rPr lang="en-US" dirty="0"/>
               <a:t>In Lecture 02 you typed 0x07e0, 255, .asciz and .word without knowing exactly what they were. This lecture gives them names. Its thesis is in the subtitle: everything inside the machine is a pattern of bits, whether it is a number, a colour, a letter or a list. The lecture is wide rather than deep: numbers are treated formally in the next two lectures; here you learn to read bits and to see that their meaning is a matter of agreement.
+Learning status: UNDERSTAND NOW, by the end of this lecture you explain it, trace it and apply it on your own; USE NOW, you follow and use the recipe today; how it works inside is explained later, or is not part of the course; UNDERSTAND LATER, recognise the name and what it is for; a later lecture explains it. A slide without a badge is context: a story, an example, a question, an exercise.
+Learning status of this lecture. UNDERSTAND NOW: analog and digital; bit, byte, word; hexadecimal; positional notation; a colour is a number; characters and strings; little-endian byte order; data structures; arrays in memory; algorithms. USE NOW: shifts as multiplications (Lecture 05) and, used without being studied in this course, the complete program, the PRG32 tools. UNDERSTAND LATER: nothing. A slide without a badge is context: a story, an example, a question, an exercise.
 For the lecturer: Spiral: the students have already seen 0x07e0, 255, .asciz and .word in Lecture 02. This lecture names what those were. The next two lectures (05, 06) treat numbers formally.</a:t>
             </a:r>
             <a:endParaRPr lang="en-US" dirty="0"/>
@@ -660,6 +662,7 @@
             <a:r>
               <a:rPr lang="en-US" dirty="0"/>
               <a:t>A string is a sequence of character codes in consecutive bytes. The problem is how to know where it ends. The C convention marks the end with a zero byte; the Pascal convention writes the length first. The third row is your string of Lecture 02: .asciz stores the eleven characters of HELLO PRG32 followed by a zero, twelve bytes in all. The function that draws text receives only the address of the first byte and reads until it finds the zero. If the zero were missing, it would continue with whatever follows in memory.
+UNDERSTAND NOW: characters and strings.
 For the lecturer: The numbers under the cells are the ASCII codes in hexadecimal. This is the string of Lecture 02, step 2. What happens if the zero is missing? The function keeps reading whatever follows in memory.</a:t>
             </a:r>
             <a:endParaRPr lang="en-US" dirty="0"/>
@@ -749,6 +752,7 @@
             <a:r>
               <a:rPr lang="en-US" dirty="0"/>
               <a:t>ASCII has 128 characters, enough for English only. Unicode assigns a number, called a code point, to every character of every writing system. UTF-8 stores that number in one to four bytes: the characters of ASCII keep their single byte, an accented letter takes two, the euro sign three, an emoji four. Two consequences. Plain ASCII text is already valid UTF-8. And the length of a string in bytes is no longer its length in characters.
+UNDERSTAND NOW: characters and strings.
 For the lecturer: Unicode assigns a number (code point) to every character of every script; UTF-8 encodes that number in one to four bytes and is compatible with ASCII. It is the encoding of the web and of your source files. Consequence: the length of a string in bytes is not its length in characters.</a:t>
             </a:r>
             <a:endParaRPr lang="en-US" dirty="0"/>
@@ -838,6 +842,7 @@
             <a:r>
               <a:rPr lang="en-US" dirty="0"/>
               <a:t>A word is four bytes, and memory has one address per byte: in which order are the four bytes stored? RISC-V is little-endian: the least significant byte goes at the lowest address, so 0x12345678 is stored as 78, 56, 34, 12. The opposite order, big-endian, is used by network protocols. Normally you do not notice, because lw and sw are consistent with each other. You notice when you look at memory byte by byte in a debugger, or exchange data with a different machine.
+UNDERSTAND NOW: little-endian byte order.
 For the lecturer: The names come from Gulliver's Travels: which end of the egg to break first. In PRG32-QT, open the memory view on a .word and read the bytes.</a:t>
             </a:r>
             <a:endParaRPr lang="en-US" dirty="0"/>
@@ -927,6 +932,7 @@
             <a:r>
               <a:rPr lang="en-US" dirty="0"/>
               <a:t>Five structures. An array keeps elements of the same type one after another and reaches them by index. A list links each element to the next: easy to modify, slow to reach by position. A stack returns first what was put in last; you used one in Lecture 02 to save ra. A dictionary associates keys with values. A tree is a hierarchy. The sixth card is the one that matters for this course: in the machine all of them are bytes in memory, plus a rule for finding the next element.
+UNDERSTAND NOW: data structures.
 For the lecturer: You have already used a stack: the frame that saved ra in Lecture 02. The examples are those drawn on the source slide.</a:t>
             </a:r>
             <a:endParaRPr lang="en-US" dirty="0"/>
@@ -1016,6 +1022,7 @@
             <a:r>
               <a:rPr lang="en-US" dirty="0"/>
               <a:t>A problem is computable if an algorithm can solve it. The Turing machine is the mathematical model of a computer with a program; the von Neumann machine is the architecture that realises it in hardware. The last line is the surprising one: there are problems that no algorithm can solve, and therefore that no computer will ever solve, however fast. The classic example is deciding, for any program, whether it will stop.
+UNDERSTAND NOW: algorithms.
 For the lecturer: The last line is the Church-Turing thesis, stated informally. The halting problem is the classic example of a problem that is not computable.</a:t>
             </a:r>
             <a:endParaRPr lang="en-US" dirty="0"/>
@@ -1104,7 +1111,8 @@
           <a:p>
             <a:r>
               <a:rPr lang="en-US" dirty="0"/>
-              <a:t>In a deterministic algorithm the same input always produces the same sequence of steps and the same result: first_update always adds one. A non-deterministic algorithm can behave differently at each run with the same input. There are two common reasons: it uses random numbers on purpose, like a game that places an enemy at random, or it depends on the timing of several things that happen together. The first kind is useful; the second is a frequent source of bugs.</a:t>
+              <a:t>In a deterministic algorithm the same input always produces the same sequence of steps and the same result: first_update always adds one. A non-deterministic algorithm can behave differently at each run with the same input. There are two common reasons: it uses random numbers on purpose, like a game that places an enemy at random, or it depends on the timing of several things that happen together. The first kind is useful; the second is a frequent source of bugs.
+UNDERSTAND NOW: algorithms.</a:t>
             </a:r>
             <a:endParaRPr lang="en-US" dirty="0"/>
           </a:p>
@@ -1640,6 +1648,7 @@
             <a:r>
               <a:rPr lang="en-US" dirty="0"/>
               <a:t>Five sentences to keep. Digital information is a pattern of bits plus a convention for reading it. The same bits can be a number, a colour or two characters: the program decides. Hexadecimal is binary written compactly, four bits per digit. Text is numbers, and structures are bytes plus a rule. Algorithms turn data into information on which decisions can be based. The next lecture treats the representation of numbers formally, starting from a marker that walks off the left edge of the screen.
+Learning status, recap. UNDERSTAND NOW: analog and digital; bit, byte, word; hexadecimal; positional notation; a colour is a number; characters and strings; little-endian byte order; data structures; arrays in memory; algorithms. USE NOW: shifts as multiplications (Lecture 05) and, used without being studied in this course, the complete program, the PRG32 tools. UNDERSTAND LATER: nothing. A slide without a badge is context: a story, an example, a question, an exercise.
 For the lecturer: Next lecture: number representation, formally.</a:t>
             </a:r>
             <a:endParaRPr lang="en-US" dirty="0"/>
@@ -1729,6 +1738,7 @@
             <a:r>
               <a:rPr lang="en-US" dirty="0"/>
               <a:t>An analog quantity varies continuously, like a voltage or the hands of a watch. A digital quantity is a sequence of symbols from a finite alphabet, like the digits of a display. In the figure the smooth curve is the analog signal; the staircase is its digital version, obtained by sampling at regular instants and quantising each sample to one of a few levels. Something is lost, and something is gained: a finite number of levels can be counted, copied without error and checked. With two levels only, the symbol is the bit.
+UNDERSTAND NOW: analog and digital.
 For the lecturer: Two levels are easy to build reliably with transistors (off or on), which is why computers are binary. Boolean algebra (Lecture 08) is the mathematics of two levels.</a:t>
             </a:r>
             <a:endParaRPr lang="en-US" dirty="0"/>
@@ -1818,6 +1828,7 @@
             <a:r>
               <a:rPr lang="en-US" dirty="0"/>
               <a:t>The units of information, each tied to something you have used. A bit is one button. A nibble, four bits, is one hexadecimal digit. A byte, eight bits, is one ASCII character, and it is the reason why the bar of Lecture 02 was at most 255 wide. A halfword, sixteen bits, is one colour. A word, thirty-two bits, is one register and one instruction. The rule to remember: n bits give 2 to the n patterns. And the caption: what a pattern means is not written in the bits.
+UNDERSTAND NOW: bit, byte, word.
 For the lecturer: n bits give 2^n distinct patterns. What a pattern means is not written in the bits: it is a convention between whoever writes them and whoever reads them. On RV32 a word is 32 bits by definition of the architecture.</a:t>
             </a:r>
             <a:endParaRPr lang="en-US" dirty="0"/>
@@ -1907,6 +1918,7 @@
             <a:r>
               <a:rPr lang="en-US" dirty="0"/>
               <a:t>Sixteen rows to learn by heart, as you once learned the multiplication tables. Each row gives the same number in decimal, in binary with four bits, and in hexadecimal with one digit. The four binary columns weigh 8, 4, 2 and 1: 1011 is 8 + 2 + 1 = 11, which hexadecimal writes B. After 9 the hexadecimal digits continue with the letters A to F for the values ten to fifteen. Cover two columns and reconstruct them from the third until you no longer need to think.
+UNDERSTAND NOW: hexadecimal.
 For the lecturer: The columns of the binary number weigh 8, 4, 2, 1. Learn this table by heart: it is the multiplication table of this course.</a:t>
             </a:r>
             <a:endParaRPr lang="en-US" dirty="0"/>
@@ -1996,6 +2008,7 @@
             <a:r>
               <a:rPr lang="en-US" dirty="0"/>
               <a:t>In a positional system a digit is worth its value times the weight of its position, and the weights are the powers of the base. The slide reads the byte 11011001 this way: the positions weigh 128, 64, 32, 16, 8, 4, 2 and 1; where the bit is 1 the weight is added, where it is 0 it is not. The sum is 128 + 64 + 16 + 8 + 1 = 217. It is exactly what you do in base ten without noticing: 217 is 2 hundreds, 1 ten and 7 units.
+UNDERSTAND NOW: positional notation.
 For the lecturer: Lecture 05 gives the general formula and the conversion algorithms. Here the aim is only to read a byte.</a:t>
             </a:r>
             <a:endParaRPr lang="en-US" dirty="0"/>
@@ -2085,6 +2098,7 @@
             <a:r>
               <a:rPr lang="en-US" dirty="0"/>
               <a:t>Sixteen is two to the fourth power, so one hexadecimal digit corresponds to exactly four bits. To convert, cut the binary number into groups of four from the right and replace each group using the table: 0000 0111 1110 0000 becomes 0, 7, E, 0. No arithmetic is needed. This is why programmers use hexadecimal: it is binary written compactly. A register is eight hexadecimal digits instead of thirty-two bits. The prefix 0x announces that a number is hexadecimal.
+UNDERSTAND NOW: hexadecimal.
 For the lecturer: 0x07E0 = 7 x 256 + 14 x 16 = 1792 + 224 = 2016. The decimal value is useless here: the bit pattern is the point, as the next slide shows.</a:t>
             </a:r>
             <a:endParaRPr lang="en-US" dirty="0"/>
@@ -2174,6 +2188,7 @@
             <a:r>
               <a:rPr lang="en-US" dirty="0"/>
               <a:t>Here the green of Lecture 02 is opened. A PRG32 colour is sixteen bits divided into three fields: five bits of red, six of green, five of blue. The format is called RGB565. In 0x07E0 the red field is 00000, the green field is 111111 and the blue field is 00000: maximum green and nothing else. The eight swatches show other combinations: yellow is red plus green, white is everything. The sentence at the bottom is the lesson of the whole lecture: the same sixteen bits could be something else entirely.
+UNDERSTAND NOW: a colour is a number.
 For the lecturer: The eye is most sensitive to green, which is why green gets the extra bit. Exercise: which colour is 0xF81F? (red and blue at maximum: magenta). The colour constants are those of prg32.h.</a:t>
             </a:r>
             <a:endParaRPr lang="en-US" dirty="0"/>
@@ -2263,6 +2278,7 @@
             <a:r>
               <a:rPr lang="en-US" dirty="0"/>
               <a:t>ASCII assigns a number to each character and fits it in one byte. Three observations from the table. The capital A is 65 and the small a is 97: they differ by 32, that is by a single bit. The character "0" is 48, not zero: a digit typed on a keyboard is not yet a number. And there are characters that do not print: the newline, 10, and NUL, 0, which you will meet on the next slide as the end of a string.
+UNDERSTAND NOW: characters and strings.
 For the lecturer: ASCII (1963) uses 7 bits: 128 characters, English only. Upper and lower case differ only in bit 5: xori with 0x20 switches case, a first taste of Boolean algebra on text.</a:t>
             </a:r>
             <a:endParaRPr lang="en-US" dirty="0"/>
@@ -3400,6 +3416,420 @@
       </p:pic>
       <p:sp>
         <p:nvSpPr>
+          <p:cNvPr id="15" name="Shape 12"/>
+          <p:cNvSpPr/>
+          <p:nvPr/>
+        </p:nvSpPr>
+        <p:spPr>
+          <a:xfrm>
+            <a:off x="9690303" y="91440"/>
+            <a:ext cx="1952752" cy="274320"/>
+          </a:xfrm>
+          <a:prstGeom prst="rect">
+            <a:avLst/>
+          </a:prstGeom>
+          <a:solidFill>
+            <a:srgbClr val="F3E8FF"/>
+          </a:solidFill>
+          <a:ln w="12700">
+            <a:solidFill>
+              <a:srgbClr val="7E22CE"/>
+            </a:solidFill>
+            <a:prstDash val="dash"/>
+          </a:ln>
+        </p:spPr>
+      </p:sp>
+      <p:sp>
+        <p:nvSpPr>
+          <p:cNvPr id="16" name="Shape 13"/>
+          <p:cNvSpPr/>
+          <p:nvPr/>
+        </p:nvSpPr>
+        <p:spPr>
+          <a:xfrm>
+            <a:off x="9717735" y="128016"/>
+            <a:ext cx="45720" cy="45720"/>
+          </a:xfrm>
+          <a:prstGeom prst="rect">
+            <a:avLst/>
+          </a:prstGeom>
+          <a:solidFill>
+            <a:srgbClr val="7E22CE"/>
+          </a:solidFill>
+          <a:ln w="12700">
+            <a:solidFill>
+              <a:srgbClr val="7E22CE"/>
+            </a:solidFill>
+            <a:prstDash val="solid"/>
+          </a:ln>
+        </p:spPr>
+      </p:sp>
+      <p:sp>
+        <p:nvSpPr>
+          <p:cNvPr id="17" name="Shape 14"/>
+          <p:cNvSpPr/>
+          <p:nvPr/>
+        </p:nvSpPr>
+        <p:spPr>
+          <a:xfrm>
+            <a:off x="9717735" y="205740"/>
+            <a:ext cx="45720" cy="45720"/>
+          </a:xfrm>
+          <a:prstGeom prst="rect">
+            <a:avLst/>
+          </a:prstGeom>
+          <a:solidFill>
+            <a:srgbClr val="7E22CE"/>
+          </a:solidFill>
+          <a:ln w="12700">
+            <a:solidFill>
+              <a:srgbClr val="7E22CE"/>
+            </a:solidFill>
+            <a:prstDash val="solid"/>
+          </a:ln>
+        </p:spPr>
+      </p:sp>
+      <p:sp>
+        <p:nvSpPr>
+          <p:cNvPr id="18" name="Shape 15"/>
+          <p:cNvSpPr/>
+          <p:nvPr/>
+        </p:nvSpPr>
+        <p:spPr>
+          <a:xfrm>
+            <a:off x="9717735" y="283464"/>
+            <a:ext cx="45720" cy="45720"/>
+          </a:xfrm>
+          <a:prstGeom prst="rect">
+            <a:avLst/>
+          </a:prstGeom>
+          <a:solidFill>
+            <a:srgbClr val="7E22CE"/>
+          </a:solidFill>
+          <a:ln w="12700">
+            <a:solidFill>
+              <a:srgbClr val="7E22CE"/>
+            </a:solidFill>
+            <a:prstDash val="solid"/>
+          </a:ln>
+        </p:spPr>
+      </p:sp>
+      <p:pic>
+        <p:nvPicPr>
+          <p:cNvPr id="19" name="Image 1" descr="preencoded.png">    </p:cNvPr>
+          <p:cNvPicPr>
+            <a:picLocks noChangeAspect="1"/>
+          </p:cNvPicPr>
+          <p:nvPr/>
+        </p:nvPicPr>
+        <p:blipFill>
+          <a:blip r:embed="rId2"/>
+          <a:stretch>
+            <a:fillRect/>
+          </a:stretch>
+        </p:blipFill>
+        <p:spPr>
+          <a:xfrm>
+            <a:off x="9818319" y="128016"/>
+            <a:ext cx="201168" cy="201168"/>
+          </a:xfrm>
+          <a:prstGeom prst="rect">
+            <a:avLst/>
+          </a:prstGeom>
+        </p:spPr>
+      </p:pic>
+      <p:sp>
+        <p:nvSpPr>
+          <p:cNvPr id="20" name="Text 16"/>
+          <p:cNvSpPr txBox="1"/>
+          <p:nvPr/>
+        </p:nvSpPr>
+        <p:spPr>
+          <a:xfrm>
+            <a:off x="10074351" y="91440"/>
+            <a:ext cx="1532128" cy="274320"/>
+          </a:xfrm>
+          <a:prstGeom prst="rect">
+            <a:avLst/>
+          </a:prstGeom>
+          <a:noFill/>
+          <a:ln/>
+        </p:spPr>
+        <p:txBody>
+          <a:bodyPr wrap="square" lIns="0" tIns="0" rIns="0" bIns="0" rtlCol="0" anchor="ctr"/>
+          <a:lstStyle/>
+          <a:p>
+            <a:pPr indent="0" marL="0">
+              <a:buNone/>
+            </a:pPr>
+            <a:r>
+              <a:rPr lang="en-US" sz="1100" b="1" dirty="0">
+                <a:solidFill>
+                  <a:srgbClr val="6B21A8"/>
+                </a:solidFill>
+                <a:latin typeface="Calibri" pitchFamily="34" charset="0"/>
+                <a:ea typeface="Calibri" pitchFamily="34" charset="-122"/>
+                <a:cs typeface="Calibri" pitchFamily="34" charset="-120"/>
+              </a:rPr>
+              <a:t>UNDERSTAND LATER</a:t>
+            </a:r>
+            <a:endParaRPr lang="en-US" sz="1100" dirty="0"/>
+          </a:p>
+        </p:txBody>
+      </p:sp>
+      <p:sp>
+        <p:nvSpPr>
+          <p:cNvPr id="21" name="Shape 17"/>
+          <p:cNvSpPr/>
+          <p:nvPr/>
+        </p:nvSpPr>
+        <p:spPr>
+          <a:xfrm>
+            <a:off x="8407349" y="91440"/>
+            <a:ext cx="1173226" cy="274320"/>
+          </a:xfrm>
+          <a:prstGeom prst="rect">
+            <a:avLst/>
+          </a:prstGeom>
+          <a:solidFill>
+            <a:srgbClr val="FEF3C7"/>
+          </a:solidFill>
+          <a:ln w="12700">
+            <a:solidFill>
+              <a:srgbClr val="B45309"/>
+            </a:solidFill>
+            <a:prstDash val="solid"/>
+          </a:ln>
+        </p:spPr>
+      </p:sp>
+      <p:sp>
+        <p:nvSpPr>
+          <p:cNvPr id="22" name="Shape 18"/>
+          <p:cNvSpPr/>
+          <p:nvPr/>
+        </p:nvSpPr>
+        <p:spPr>
+          <a:xfrm>
+            <a:off x="8407349" y="91440"/>
+            <a:ext cx="27432" cy="274320"/>
+          </a:xfrm>
+          <a:prstGeom prst="rect">
+            <a:avLst/>
+          </a:prstGeom>
+          <a:solidFill>
+            <a:srgbClr val="B45309"/>
+          </a:solidFill>
+          <a:ln w="12700">
+            <a:solidFill>
+              <a:srgbClr val="B45309"/>
+            </a:solidFill>
+            <a:prstDash val="solid"/>
+          </a:ln>
+        </p:spPr>
+      </p:sp>
+      <p:sp>
+        <p:nvSpPr>
+          <p:cNvPr id="23" name="Shape 19"/>
+          <p:cNvSpPr/>
+          <p:nvPr/>
+        </p:nvSpPr>
+        <p:spPr>
+          <a:xfrm>
+            <a:off x="8462213" y="91440"/>
+            <a:ext cx="27432" cy="274320"/>
+          </a:xfrm>
+          <a:prstGeom prst="rect">
+            <a:avLst/>
+          </a:prstGeom>
+          <a:solidFill>
+            <a:srgbClr val="B45309"/>
+          </a:solidFill>
+          <a:ln w="12700">
+            <a:solidFill>
+              <a:srgbClr val="B45309"/>
+            </a:solidFill>
+            <a:prstDash val="solid"/>
+          </a:ln>
+        </p:spPr>
+      </p:sp>
+      <p:pic>
+        <p:nvPicPr>
+          <p:cNvPr id="24" name="Image 2" descr="preencoded.png">    </p:cNvPr>
+          <p:cNvPicPr>
+            <a:picLocks noChangeAspect="1"/>
+          </p:cNvPicPr>
+          <p:nvPr/>
+        </p:nvPicPr>
+        <p:blipFill>
+          <a:blip r:embed="rId3"/>
+          <a:stretch>
+            <a:fillRect/>
+          </a:stretch>
+        </p:blipFill>
+        <p:spPr>
+          <a:xfrm>
+            <a:off x="8535365" y="128016"/>
+            <a:ext cx="201168" cy="201168"/>
+          </a:xfrm>
+          <a:prstGeom prst="rect">
+            <a:avLst/>
+          </a:prstGeom>
+        </p:spPr>
+      </p:pic>
+      <p:sp>
+        <p:nvSpPr>
+          <p:cNvPr id="25" name="Text 20"/>
+          <p:cNvSpPr txBox="1"/>
+          <p:nvPr/>
+        </p:nvSpPr>
+        <p:spPr>
+          <a:xfrm>
+            <a:off x="8791397" y="91440"/>
+            <a:ext cx="752602" cy="274320"/>
+          </a:xfrm>
+          <a:prstGeom prst="rect">
+            <a:avLst/>
+          </a:prstGeom>
+          <a:noFill/>
+          <a:ln/>
+        </p:spPr>
+        <p:txBody>
+          <a:bodyPr wrap="square" lIns="0" tIns="0" rIns="0" bIns="0" rtlCol="0" anchor="ctr"/>
+          <a:lstStyle/>
+          <a:p>
+            <a:pPr indent="0" marL="0">
+              <a:buNone/>
+            </a:pPr>
+            <a:r>
+              <a:rPr lang="en-US" sz="1100" b="1" dirty="0">
+                <a:solidFill>
+                  <a:srgbClr val="92400E"/>
+                </a:solidFill>
+                <a:latin typeface="Calibri" pitchFamily="34" charset="0"/>
+                <a:ea typeface="Calibri" pitchFamily="34" charset="-122"/>
+                <a:cs typeface="Calibri" pitchFamily="34" charset="-120"/>
+              </a:rPr>
+              <a:t>USE NOW</a:t>
+            </a:r>
+            <a:endParaRPr lang="en-US" sz="1100" dirty="0"/>
+          </a:p>
+        </p:txBody>
+      </p:sp>
+      <p:sp>
+        <p:nvSpPr>
+          <p:cNvPr id="26" name="Shape 21"/>
+          <p:cNvSpPr/>
+          <p:nvPr/>
+        </p:nvSpPr>
+        <p:spPr>
+          <a:xfrm>
+            <a:off x="6518097" y="91440"/>
+            <a:ext cx="1779524" cy="274320"/>
+          </a:xfrm>
+          <a:prstGeom prst="rect">
+            <a:avLst/>
+          </a:prstGeom>
+          <a:solidFill>
+            <a:srgbClr val="E0F2FE"/>
+          </a:solidFill>
+          <a:ln w="12700">
+            <a:solidFill>
+              <a:srgbClr val="0369A1"/>
+            </a:solidFill>
+            <a:prstDash val="solid"/>
+          </a:ln>
+        </p:spPr>
+      </p:sp>
+      <p:sp>
+        <p:nvSpPr>
+          <p:cNvPr id="27" name="Shape 22"/>
+          <p:cNvSpPr/>
+          <p:nvPr/>
+        </p:nvSpPr>
+        <p:spPr>
+          <a:xfrm>
+            <a:off x="6518097" y="91440"/>
+            <a:ext cx="73152" cy="274320"/>
+          </a:xfrm>
+          <a:prstGeom prst="rect">
+            <a:avLst/>
+          </a:prstGeom>
+          <a:solidFill>
+            <a:srgbClr val="0369A1"/>
+          </a:solidFill>
+          <a:ln w="12700">
+            <a:solidFill>
+              <a:srgbClr val="0369A1"/>
+            </a:solidFill>
+            <a:prstDash val="solid"/>
+          </a:ln>
+        </p:spPr>
+      </p:sp>
+      <p:pic>
+        <p:nvPicPr>
+          <p:cNvPr id="28" name="Image 3" descr="preencoded.png">    </p:cNvPr>
+          <p:cNvPicPr>
+            <a:picLocks noChangeAspect="1"/>
+          </p:cNvPicPr>
+          <p:nvPr/>
+        </p:nvPicPr>
+        <p:blipFill>
+          <a:blip r:embed="rId4"/>
+          <a:stretch>
+            <a:fillRect/>
+          </a:stretch>
+        </p:blipFill>
+        <p:spPr>
+          <a:xfrm>
+            <a:off x="6646113" y="128016"/>
+            <a:ext cx="201168" cy="201168"/>
+          </a:xfrm>
+          <a:prstGeom prst="rect">
+            <a:avLst/>
+          </a:prstGeom>
+        </p:spPr>
+      </p:pic>
+      <p:sp>
+        <p:nvSpPr>
+          <p:cNvPr id="29" name="Text 23"/>
+          <p:cNvSpPr txBox="1"/>
+          <p:nvPr/>
+        </p:nvSpPr>
+        <p:spPr>
+          <a:xfrm>
+            <a:off x="6902145" y="91440"/>
+            <a:ext cx="1358900" cy="274320"/>
+          </a:xfrm>
+          <a:prstGeom prst="rect">
+            <a:avLst/>
+          </a:prstGeom>
+          <a:noFill/>
+          <a:ln/>
+        </p:spPr>
+        <p:txBody>
+          <a:bodyPr wrap="square" lIns="0" tIns="0" rIns="0" bIns="0" rtlCol="0" anchor="ctr"/>
+          <a:lstStyle/>
+          <a:p>
+            <a:pPr indent="0" marL="0">
+              <a:buNone/>
+            </a:pPr>
+            <a:r>
+              <a:rPr lang="en-US" sz="1100" b="1" dirty="0">
+                <a:solidFill>
+                  <a:srgbClr val="075985"/>
+                </a:solidFill>
+                <a:latin typeface="Calibri" pitchFamily="34" charset="0"/>
+                <a:ea typeface="Calibri" pitchFamily="34" charset="-122"/>
+                <a:cs typeface="Calibri" pitchFamily="34" charset="-120"/>
+              </a:rPr>
+              <a:t>UNDERSTAND NOW</a:t>
+            </a:r>
+            <a:endParaRPr lang="en-US" sz="1100" dirty="0"/>
+          </a:p>
+        </p:txBody>
+      </p:sp>
+      <p:sp>
+        <p:nvSpPr>
           <p:cNvPr id="25" name="Slide Number Placeholder 0"/>
           <p:cNvSpPr>
             <a:spLocks noGrp="1"/>
@@ -5618,6 +6048,133 @@
               <a:t>The z of .asciz means zero-terminated: the assembler stores twelve bytes for eleven characters. prg32_gfx_text8 receives only the address of the first byte in a2, and reads until it finds the zero.</a:t>
             </a:r>
             <a:endParaRPr lang="en-US" sz="1700" dirty="0"/>
+          </a:p>
+        </p:txBody>
+      </p:sp>
+      <p:sp>
+        <p:nvSpPr>
+          <p:cNvPr id="54" name="Shape 52"/>
+          <p:cNvSpPr/>
+          <p:nvPr/>
+        </p:nvSpPr>
+        <p:spPr>
+          <a:xfrm>
+            <a:off x="8222056" y="91440"/>
+            <a:ext cx="3420999" cy="274320"/>
+          </a:xfrm>
+          <a:prstGeom prst="rect">
+            <a:avLst/>
+          </a:prstGeom>
+          <a:solidFill>
+            <a:srgbClr val="E0F2FE"/>
+          </a:solidFill>
+          <a:ln w="12700">
+            <a:solidFill>
+              <a:srgbClr val="0369A1"/>
+            </a:solidFill>
+            <a:prstDash val="solid"/>
+          </a:ln>
+        </p:spPr>
+      </p:sp>
+      <p:sp>
+        <p:nvSpPr>
+          <p:cNvPr id="55" name="Shape 53"/>
+          <p:cNvSpPr/>
+          <p:nvPr/>
+        </p:nvSpPr>
+        <p:spPr>
+          <a:xfrm>
+            <a:off x="8222056" y="91440"/>
+            <a:ext cx="73152" cy="274320"/>
+          </a:xfrm>
+          <a:prstGeom prst="rect">
+            <a:avLst/>
+          </a:prstGeom>
+          <a:solidFill>
+            <a:srgbClr val="0369A1"/>
+          </a:solidFill>
+          <a:ln w="12700">
+            <a:solidFill>
+              <a:srgbClr val="0369A1"/>
+            </a:solidFill>
+            <a:prstDash val="solid"/>
+          </a:ln>
+        </p:spPr>
+      </p:sp>
+      <p:pic>
+        <p:nvPicPr>
+          <p:cNvPr id="56" name="Image 0" descr="preencoded.png">    </p:cNvPr>
+          <p:cNvPicPr>
+            <a:picLocks noChangeAspect="1"/>
+          </p:cNvPicPr>
+          <p:nvPr/>
+        </p:nvPicPr>
+        <p:blipFill>
+          <a:blip r:embed="rId1"/>
+          <a:stretch>
+            <a:fillRect/>
+          </a:stretch>
+        </p:blipFill>
+        <p:spPr>
+          <a:xfrm>
+            <a:off x="8350072" y="128016"/>
+            <a:ext cx="201168" cy="201168"/>
+          </a:xfrm>
+          <a:prstGeom prst="rect">
+            <a:avLst/>
+          </a:prstGeom>
+        </p:spPr>
+      </p:pic>
+      <p:sp>
+        <p:nvSpPr>
+          <p:cNvPr id="57" name="Text 54"/>
+          <p:cNvSpPr txBox="1"/>
+          <p:nvPr/>
+        </p:nvSpPr>
+        <p:spPr>
+          <a:xfrm>
+            <a:off x="8606104" y="91440"/>
+            <a:ext cx="3000375" cy="274320"/>
+          </a:xfrm>
+          <a:prstGeom prst="rect">
+            <a:avLst/>
+          </a:prstGeom>
+          <a:noFill/>
+          <a:ln/>
+        </p:spPr>
+        <p:txBody>
+          <a:bodyPr wrap="square" lIns="0" tIns="0" rIns="0" bIns="0" rtlCol="0" anchor="ctr"/>
+          <a:lstStyle/>
+          <a:p>
+            <a:pPr indent="0" marL="0">
+              <a:buNone/>
+            </a:pPr>
+            <a:r>
+              <a:rPr lang="en-US" sz="1100" b="1" dirty="0">
+                <a:solidFill>
+                  <a:srgbClr val="075985"/>
+                </a:solidFill>
+                <a:latin typeface="Calibri" pitchFamily="34" charset="0"/>
+                <a:ea typeface="Calibri" pitchFamily="34" charset="-122"/>
+                <a:cs typeface="Calibri" pitchFamily="34" charset="-120"/>
+              </a:rPr>
+              <a:t>UNDERSTAND NOW</a:t>
+            </a:r>
+            <a:pPr indent="0" marL="0">
+              <a:buNone/>
+            </a:pPr>
+            <a:r>
+              <a:rPr lang="en-US" sz="1100" dirty="0">
+                <a:solidFill>
+                  <a:srgbClr val="075985"/>
+                </a:solidFill>
+                <a:latin typeface="Calibri" pitchFamily="34" charset="0"/>
+                <a:ea typeface="Calibri" pitchFamily="34" charset="-122"/>
+                <a:cs typeface="Calibri" pitchFamily="34" charset="-120"/>
+              </a:rPr>
+              <a:t> · characters and strings</a:t>
+            </a:r>
+            <a:endParaRPr lang="en-US" sz="1100" dirty="0"/>
           </a:p>
         </p:txBody>
       </p:sp>
@@ -7452,6 +8009,133 @@
       </p:sp>
       <p:sp>
         <p:nvSpPr>
+          <p:cNvPr id="5" name="Shape 2"/>
+          <p:cNvSpPr/>
+          <p:nvPr/>
+        </p:nvSpPr>
+        <p:spPr>
+          <a:xfrm>
+            <a:off x="8222056" y="91440"/>
+            <a:ext cx="3420999" cy="274320"/>
+          </a:xfrm>
+          <a:prstGeom prst="rect">
+            <a:avLst/>
+          </a:prstGeom>
+          <a:solidFill>
+            <a:srgbClr val="E0F2FE"/>
+          </a:solidFill>
+          <a:ln w="12700">
+            <a:solidFill>
+              <a:srgbClr val="0369A1"/>
+            </a:solidFill>
+            <a:prstDash val="solid"/>
+          </a:ln>
+        </p:spPr>
+      </p:sp>
+      <p:sp>
+        <p:nvSpPr>
+          <p:cNvPr id="6" name="Shape 3"/>
+          <p:cNvSpPr/>
+          <p:nvPr/>
+        </p:nvSpPr>
+        <p:spPr>
+          <a:xfrm>
+            <a:off x="8222056" y="91440"/>
+            <a:ext cx="73152" cy="274320"/>
+          </a:xfrm>
+          <a:prstGeom prst="rect">
+            <a:avLst/>
+          </a:prstGeom>
+          <a:solidFill>
+            <a:srgbClr val="0369A1"/>
+          </a:solidFill>
+          <a:ln w="12700">
+            <a:solidFill>
+              <a:srgbClr val="0369A1"/>
+            </a:solidFill>
+            <a:prstDash val="solid"/>
+          </a:ln>
+        </p:spPr>
+      </p:sp>
+      <p:pic>
+        <p:nvPicPr>
+          <p:cNvPr id="7" name="Image 0" descr="preencoded.png">    </p:cNvPr>
+          <p:cNvPicPr>
+            <a:picLocks noChangeAspect="1"/>
+          </p:cNvPicPr>
+          <p:nvPr/>
+        </p:nvPicPr>
+        <p:blipFill>
+          <a:blip r:embed="rId1"/>
+          <a:stretch>
+            <a:fillRect/>
+          </a:stretch>
+        </p:blipFill>
+        <p:spPr>
+          <a:xfrm>
+            <a:off x="8350072" y="128016"/>
+            <a:ext cx="201168" cy="201168"/>
+          </a:xfrm>
+          <a:prstGeom prst="rect">
+            <a:avLst/>
+          </a:prstGeom>
+        </p:spPr>
+      </p:pic>
+      <p:sp>
+        <p:nvSpPr>
+          <p:cNvPr id="8" name="Text 4"/>
+          <p:cNvSpPr txBox="1"/>
+          <p:nvPr/>
+        </p:nvSpPr>
+        <p:spPr>
+          <a:xfrm>
+            <a:off x="8606104" y="91440"/>
+            <a:ext cx="3000375" cy="274320"/>
+          </a:xfrm>
+          <a:prstGeom prst="rect">
+            <a:avLst/>
+          </a:prstGeom>
+          <a:noFill/>
+          <a:ln/>
+        </p:spPr>
+        <p:txBody>
+          <a:bodyPr wrap="square" lIns="0" tIns="0" rIns="0" bIns="0" rtlCol="0" anchor="ctr"/>
+          <a:lstStyle/>
+          <a:p>
+            <a:pPr indent="0" marL="0">
+              <a:buNone/>
+            </a:pPr>
+            <a:r>
+              <a:rPr lang="en-US" sz="1100" b="1" dirty="0">
+                <a:solidFill>
+                  <a:srgbClr val="075985"/>
+                </a:solidFill>
+                <a:latin typeface="Calibri" pitchFamily="34" charset="0"/>
+                <a:ea typeface="Calibri" pitchFamily="34" charset="-122"/>
+                <a:cs typeface="Calibri" pitchFamily="34" charset="-120"/>
+              </a:rPr>
+              <a:t>UNDERSTAND NOW</a:t>
+            </a:r>
+            <a:pPr indent="0" marL="0">
+              <a:buNone/>
+            </a:pPr>
+            <a:r>
+              <a:rPr lang="en-US" sz="1100" dirty="0">
+                <a:solidFill>
+                  <a:srgbClr val="075985"/>
+                </a:solidFill>
+                <a:latin typeface="Calibri" pitchFamily="34" charset="0"/>
+                <a:ea typeface="Calibri" pitchFamily="34" charset="-122"/>
+                <a:cs typeface="Calibri" pitchFamily="34" charset="-120"/>
+              </a:rPr>
+              <a:t> · characters and strings</a:t>
+            </a:r>
+            <a:endParaRPr lang="en-US" sz="1100" dirty="0"/>
+          </a:p>
+        </p:txBody>
+      </p:sp>
+      <p:sp>
+        <p:nvSpPr>
           <p:cNvPr id="25" name="Slide Number Placeholder 0"/>
           <p:cNvSpPr>
             <a:spLocks noGrp="1"/>
@@ -8590,6 +9274,133 @@
       </p:sp>
       <p:sp>
         <p:nvSpPr>
+          <p:cNvPr id="28" name="Shape 26"/>
+          <p:cNvSpPr/>
+          <p:nvPr/>
+        </p:nvSpPr>
+        <p:spPr>
+          <a:xfrm>
+            <a:off x="8090738" y="91440"/>
+            <a:ext cx="3552317" cy="274320"/>
+          </a:xfrm>
+          <a:prstGeom prst="rect">
+            <a:avLst/>
+          </a:prstGeom>
+          <a:solidFill>
+            <a:srgbClr val="E0F2FE"/>
+          </a:solidFill>
+          <a:ln w="12700">
+            <a:solidFill>
+              <a:srgbClr val="0369A1"/>
+            </a:solidFill>
+            <a:prstDash val="solid"/>
+          </a:ln>
+        </p:spPr>
+      </p:sp>
+      <p:sp>
+        <p:nvSpPr>
+          <p:cNvPr id="29" name="Shape 27"/>
+          <p:cNvSpPr/>
+          <p:nvPr/>
+        </p:nvSpPr>
+        <p:spPr>
+          <a:xfrm>
+            <a:off x="8090738" y="91440"/>
+            <a:ext cx="73152" cy="274320"/>
+          </a:xfrm>
+          <a:prstGeom prst="rect">
+            <a:avLst/>
+          </a:prstGeom>
+          <a:solidFill>
+            <a:srgbClr val="0369A1"/>
+          </a:solidFill>
+          <a:ln w="12700">
+            <a:solidFill>
+              <a:srgbClr val="0369A1"/>
+            </a:solidFill>
+            <a:prstDash val="solid"/>
+          </a:ln>
+        </p:spPr>
+      </p:sp>
+      <p:pic>
+        <p:nvPicPr>
+          <p:cNvPr id="30" name="Image 0" descr="preencoded.png">    </p:cNvPr>
+          <p:cNvPicPr>
+            <a:picLocks noChangeAspect="1"/>
+          </p:cNvPicPr>
+          <p:nvPr/>
+        </p:nvPicPr>
+        <p:blipFill>
+          <a:blip r:embed="rId1"/>
+          <a:stretch>
+            <a:fillRect/>
+          </a:stretch>
+        </p:blipFill>
+        <p:spPr>
+          <a:xfrm>
+            <a:off x="8218754" y="128016"/>
+            <a:ext cx="201168" cy="201168"/>
+          </a:xfrm>
+          <a:prstGeom prst="rect">
+            <a:avLst/>
+          </a:prstGeom>
+        </p:spPr>
+      </p:pic>
+      <p:sp>
+        <p:nvSpPr>
+          <p:cNvPr id="31" name="Text 28"/>
+          <p:cNvSpPr txBox="1"/>
+          <p:nvPr/>
+        </p:nvSpPr>
+        <p:spPr>
+          <a:xfrm>
+            <a:off x="8474786" y="91440"/>
+            <a:ext cx="3131693" cy="274320"/>
+          </a:xfrm>
+          <a:prstGeom prst="rect">
+            <a:avLst/>
+          </a:prstGeom>
+          <a:noFill/>
+          <a:ln/>
+        </p:spPr>
+        <p:txBody>
+          <a:bodyPr wrap="square" lIns="0" tIns="0" rIns="0" bIns="0" rtlCol="0" anchor="ctr"/>
+          <a:lstStyle/>
+          <a:p>
+            <a:pPr indent="0" marL="0">
+              <a:buNone/>
+            </a:pPr>
+            <a:r>
+              <a:rPr lang="en-US" sz="1100" b="1" dirty="0">
+                <a:solidFill>
+                  <a:srgbClr val="075985"/>
+                </a:solidFill>
+                <a:latin typeface="Calibri" pitchFamily="34" charset="0"/>
+                <a:ea typeface="Calibri" pitchFamily="34" charset="-122"/>
+                <a:cs typeface="Calibri" pitchFamily="34" charset="-120"/>
+              </a:rPr>
+              <a:t>UNDERSTAND NOW</a:t>
+            </a:r>
+            <a:pPr indent="0" marL="0">
+              <a:buNone/>
+            </a:pPr>
+            <a:r>
+              <a:rPr lang="en-US" sz="1100" dirty="0">
+                <a:solidFill>
+                  <a:srgbClr val="075985"/>
+                </a:solidFill>
+                <a:latin typeface="Calibri" pitchFamily="34" charset="0"/>
+                <a:ea typeface="Calibri" pitchFamily="34" charset="-122"/>
+                <a:cs typeface="Calibri" pitchFamily="34" charset="-120"/>
+              </a:rPr>
+              <a:t> · little-endian byte order</a:t>
+            </a:r>
+            <a:endParaRPr lang="en-US" sz="1100" dirty="0"/>
+          </a:p>
+        </p:txBody>
+      </p:sp>
+      <p:sp>
+        <p:nvSpPr>
           <p:cNvPr id="25" name="Slide Number Placeholder 0"/>
           <p:cNvSpPr>
             <a:spLocks noGrp="1"/>
@@ -9616,6 +10427,133 @@
       </p:sp>
       <p:sp>
         <p:nvSpPr>
+          <p:cNvPr id="27" name="Shape 25"/>
+          <p:cNvSpPr/>
+          <p:nvPr/>
+        </p:nvSpPr>
+        <p:spPr>
+          <a:xfrm>
+            <a:off x="8681669" y="91440"/>
+            <a:ext cx="2961386" cy="274320"/>
+          </a:xfrm>
+          <a:prstGeom prst="rect">
+            <a:avLst/>
+          </a:prstGeom>
+          <a:solidFill>
+            <a:srgbClr val="E0F2FE"/>
+          </a:solidFill>
+          <a:ln w="12700">
+            <a:solidFill>
+              <a:srgbClr val="0369A1"/>
+            </a:solidFill>
+            <a:prstDash val="solid"/>
+          </a:ln>
+        </p:spPr>
+      </p:sp>
+      <p:sp>
+        <p:nvSpPr>
+          <p:cNvPr id="28" name="Shape 26"/>
+          <p:cNvSpPr/>
+          <p:nvPr/>
+        </p:nvSpPr>
+        <p:spPr>
+          <a:xfrm>
+            <a:off x="8681669" y="91440"/>
+            <a:ext cx="73152" cy="274320"/>
+          </a:xfrm>
+          <a:prstGeom prst="rect">
+            <a:avLst/>
+          </a:prstGeom>
+          <a:solidFill>
+            <a:srgbClr val="0369A1"/>
+          </a:solidFill>
+          <a:ln w="12700">
+            <a:solidFill>
+              <a:srgbClr val="0369A1"/>
+            </a:solidFill>
+            <a:prstDash val="solid"/>
+          </a:ln>
+        </p:spPr>
+      </p:sp>
+      <p:pic>
+        <p:nvPicPr>
+          <p:cNvPr id="29" name="Image 0" descr="preencoded.png">    </p:cNvPr>
+          <p:cNvPicPr>
+            <a:picLocks noChangeAspect="1"/>
+          </p:cNvPicPr>
+          <p:nvPr/>
+        </p:nvPicPr>
+        <p:blipFill>
+          <a:blip r:embed="rId1"/>
+          <a:stretch>
+            <a:fillRect/>
+          </a:stretch>
+        </p:blipFill>
+        <p:spPr>
+          <a:xfrm>
+            <a:off x="8809685" y="128016"/>
+            <a:ext cx="201168" cy="201168"/>
+          </a:xfrm>
+          <a:prstGeom prst="rect">
+            <a:avLst/>
+          </a:prstGeom>
+        </p:spPr>
+      </p:pic>
+      <p:sp>
+        <p:nvSpPr>
+          <p:cNvPr id="30" name="Text 27"/>
+          <p:cNvSpPr txBox="1"/>
+          <p:nvPr/>
+        </p:nvSpPr>
+        <p:spPr>
+          <a:xfrm>
+            <a:off x="9065717" y="91440"/>
+            <a:ext cx="2540762" cy="274320"/>
+          </a:xfrm>
+          <a:prstGeom prst="rect">
+            <a:avLst/>
+          </a:prstGeom>
+          <a:noFill/>
+          <a:ln/>
+        </p:spPr>
+        <p:txBody>
+          <a:bodyPr wrap="square" lIns="0" tIns="0" rIns="0" bIns="0" rtlCol="0" anchor="ctr"/>
+          <a:lstStyle/>
+          <a:p>
+            <a:pPr indent="0" marL="0">
+              <a:buNone/>
+            </a:pPr>
+            <a:r>
+              <a:rPr lang="en-US" sz="1100" b="1" dirty="0">
+                <a:solidFill>
+                  <a:srgbClr val="075985"/>
+                </a:solidFill>
+                <a:latin typeface="Calibri" pitchFamily="34" charset="0"/>
+                <a:ea typeface="Calibri" pitchFamily="34" charset="-122"/>
+                <a:cs typeface="Calibri" pitchFamily="34" charset="-120"/>
+              </a:rPr>
+              <a:t>UNDERSTAND NOW</a:t>
+            </a:r>
+            <a:pPr indent="0" marL="0">
+              <a:buNone/>
+            </a:pPr>
+            <a:r>
+              <a:rPr lang="en-US" sz="1100" dirty="0">
+                <a:solidFill>
+                  <a:srgbClr val="075985"/>
+                </a:solidFill>
+                <a:latin typeface="Calibri" pitchFamily="34" charset="0"/>
+                <a:ea typeface="Calibri" pitchFamily="34" charset="-122"/>
+                <a:cs typeface="Calibri" pitchFamily="34" charset="-120"/>
+              </a:rPr>
+              <a:t> · data structures</a:t>
+            </a:r>
+            <a:endParaRPr lang="en-US" sz="1100" dirty="0"/>
+          </a:p>
+        </p:txBody>
+      </p:sp>
+      <p:sp>
+        <p:nvSpPr>
           <p:cNvPr id="25" name="Slide Number Placeholder 0"/>
           <p:cNvSpPr>
             <a:spLocks noGrp="1"/>
@@ -10143,6 +11081,133 @@
       </p:sp>
       <p:sp>
         <p:nvSpPr>
+          <p:cNvPr id="14" name="Shape 12"/>
+          <p:cNvSpPr/>
+          <p:nvPr/>
+        </p:nvSpPr>
+        <p:spPr>
+          <a:xfrm>
+            <a:off x="9009964" y="91440"/>
+            <a:ext cx="2633091" cy="274320"/>
+          </a:xfrm>
+          <a:prstGeom prst="rect">
+            <a:avLst/>
+          </a:prstGeom>
+          <a:solidFill>
+            <a:srgbClr val="E0F2FE"/>
+          </a:solidFill>
+          <a:ln w="12700">
+            <a:solidFill>
+              <a:srgbClr val="0369A1"/>
+            </a:solidFill>
+            <a:prstDash val="solid"/>
+          </a:ln>
+        </p:spPr>
+      </p:sp>
+      <p:sp>
+        <p:nvSpPr>
+          <p:cNvPr id="15" name="Shape 13"/>
+          <p:cNvSpPr/>
+          <p:nvPr/>
+        </p:nvSpPr>
+        <p:spPr>
+          <a:xfrm>
+            <a:off x="9009964" y="91440"/>
+            <a:ext cx="73152" cy="274320"/>
+          </a:xfrm>
+          <a:prstGeom prst="rect">
+            <a:avLst/>
+          </a:prstGeom>
+          <a:solidFill>
+            <a:srgbClr val="0369A1"/>
+          </a:solidFill>
+          <a:ln w="12700">
+            <a:solidFill>
+              <a:srgbClr val="0369A1"/>
+            </a:solidFill>
+            <a:prstDash val="solid"/>
+          </a:ln>
+        </p:spPr>
+      </p:sp>
+      <p:pic>
+        <p:nvPicPr>
+          <p:cNvPr id="16" name="Image 0" descr="preencoded.png">    </p:cNvPr>
+          <p:cNvPicPr>
+            <a:picLocks noChangeAspect="1"/>
+          </p:cNvPicPr>
+          <p:nvPr/>
+        </p:nvPicPr>
+        <p:blipFill>
+          <a:blip r:embed="rId1"/>
+          <a:stretch>
+            <a:fillRect/>
+          </a:stretch>
+        </p:blipFill>
+        <p:spPr>
+          <a:xfrm>
+            <a:off x="9137980" y="128016"/>
+            <a:ext cx="201168" cy="201168"/>
+          </a:xfrm>
+          <a:prstGeom prst="rect">
+            <a:avLst/>
+          </a:prstGeom>
+        </p:spPr>
+      </p:pic>
+      <p:sp>
+        <p:nvSpPr>
+          <p:cNvPr id="17" name="Text 14"/>
+          <p:cNvSpPr txBox="1"/>
+          <p:nvPr/>
+        </p:nvSpPr>
+        <p:spPr>
+          <a:xfrm>
+            <a:off x="9394012" y="91440"/>
+            <a:ext cx="2212467" cy="274320"/>
+          </a:xfrm>
+          <a:prstGeom prst="rect">
+            <a:avLst/>
+          </a:prstGeom>
+          <a:noFill/>
+          <a:ln/>
+        </p:spPr>
+        <p:txBody>
+          <a:bodyPr wrap="square" lIns="0" tIns="0" rIns="0" bIns="0" rtlCol="0" anchor="ctr"/>
+          <a:lstStyle/>
+          <a:p>
+            <a:pPr indent="0" marL="0">
+              <a:buNone/>
+            </a:pPr>
+            <a:r>
+              <a:rPr lang="en-US" sz="1100" b="1" dirty="0">
+                <a:solidFill>
+                  <a:srgbClr val="075985"/>
+                </a:solidFill>
+                <a:latin typeface="Calibri" pitchFamily="34" charset="0"/>
+                <a:ea typeface="Calibri" pitchFamily="34" charset="-122"/>
+                <a:cs typeface="Calibri" pitchFamily="34" charset="-120"/>
+              </a:rPr>
+              <a:t>UNDERSTAND NOW</a:t>
+            </a:r>
+            <a:pPr indent="0" marL="0">
+              <a:buNone/>
+            </a:pPr>
+            <a:r>
+              <a:rPr lang="en-US" sz="1100" dirty="0">
+                <a:solidFill>
+                  <a:srgbClr val="075985"/>
+                </a:solidFill>
+                <a:latin typeface="Calibri" pitchFamily="34" charset="0"/>
+                <a:ea typeface="Calibri" pitchFamily="34" charset="-122"/>
+                <a:cs typeface="Calibri" pitchFamily="34" charset="-120"/>
+              </a:rPr>
+              <a:t> · algorithms</a:t>
+            </a:r>
+            <a:endParaRPr lang="en-US" sz="1100" dirty="0"/>
+          </a:p>
+        </p:txBody>
+      </p:sp>
+      <p:sp>
+        <p:nvSpPr>
           <p:cNvPr id="25" name="Slide Number Placeholder 0"/>
           <p:cNvSpPr>
             <a:spLocks noGrp="1"/>
@@ -10612,6 +11677,133 @@
               <a:t>Example: a game that places the enemy with prg32_random_number</a:t>
             </a:r>
             <a:endParaRPr lang="en-US" sz="2100" dirty="0"/>
+          </a:p>
+        </p:txBody>
+      </p:sp>
+      <p:sp>
+        <p:nvSpPr>
+          <p:cNvPr id="9" name="Shape 7"/>
+          <p:cNvSpPr/>
+          <p:nvPr/>
+        </p:nvSpPr>
+        <p:spPr>
+          <a:xfrm>
+            <a:off x="9009964" y="91440"/>
+            <a:ext cx="2633091" cy="274320"/>
+          </a:xfrm>
+          <a:prstGeom prst="rect">
+            <a:avLst/>
+          </a:prstGeom>
+          <a:solidFill>
+            <a:srgbClr val="E0F2FE"/>
+          </a:solidFill>
+          <a:ln w="12700">
+            <a:solidFill>
+              <a:srgbClr val="0369A1"/>
+            </a:solidFill>
+            <a:prstDash val="solid"/>
+          </a:ln>
+        </p:spPr>
+      </p:sp>
+      <p:sp>
+        <p:nvSpPr>
+          <p:cNvPr id="10" name="Shape 8"/>
+          <p:cNvSpPr/>
+          <p:nvPr/>
+        </p:nvSpPr>
+        <p:spPr>
+          <a:xfrm>
+            <a:off x="9009964" y="91440"/>
+            <a:ext cx="73152" cy="274320"/>
+          </a:xfrm>
+          <a:prstGeom prst="rect">
+            <a:avLst/>
+          </a:prstGeom>
+          <a:solidFill>
+            <a:srgbClr val="0369A1"/>
+          </a:solidFill>
+          <a:ln w="12700">
+            <a:solidFill>
+              <a:srgbClr val="0369A1"/>
+            </a:solidFill>
+            <a:prstDash val="solid"/>
+          </a:ln>
+        </p:spPr>
+      </p:sp>
+      <p:pic>
+        <p:nvPicPr>
+          <p:cNvPr id="11" name="Image 0" descr="preencoded.png">    </p:cNvPr>
+          <p:cNvPicPr>
+            <a:picLocks noChangeAspect="1"/>
+          </p:cNvPicPr>
+          <p:nvPr/>
+        </p:nvPicPr>
+        <p:blipFill>
+          <a:blip r:embed="rId1"/>
+          <a:stretch>
+            <a:fillRect/>
+          </a:stretch>
+        </p:blipFill>
+        <p:spPr>
+          <a:xfrm>
+            <a:off x="9137980" y="128016"/>
+            <a:ext cx="201168" cy="201168"/>
+          </a:xfrm>
+          <a:prstGeom prst="rect">
+            <a:avLst/>
+          </a:prstGeom>
+        </p:spPr>
+      </p:pic>
+      <p:sp>
+        <p:nvSpPr>
+          <p:cNvPr id="12" name="Text 9"/>
+          <p:cNvSpPr txBox="1"/>
+          <p:nvPr/>
+        </p:nvSpPr>
+        <p:spPr>
+          <a:xfrm>
+            <a:off x="9394012" y="91440"/>
+            <a:ext cx="2212467" cy="274320"/>
+          </a:xfrm>
+          <a:prstGeom prst="rect">
+            <a:avLst/>
+          </a:prstGeom>
+          <a:noFill/>
+          <a:ln/>
+        </p:spPr>
+        <p:txBody>
+          <a:bodyPr wrap="square" lIns="0" tIns="0" rIns="0" bIns="0" rtlCol="0" anchor="ctr"/>
+          <a:lstStyle/>
+          <a:p>
+            <a:pPr indent="0" marL="0">
+              <a:buNone/>
+            </a:pPr>
+            <a:r>
+              <a:rPr lang="en-US" sz="1100" b="1" dirty="0">
+                <a:solidFill>
+                  <a:srgbClr val="075985"/>
+                </a:solidFill>
+                <a:latin typeface="Calibri" pitchFamily="34" charset="0"/>
+                <a:ea typeface="Calibri" pitchFamily="34" charset="-122"/>
+                <a:cs typeface="Calibri" pitchFamily="34" charset="-120"/>
+              </a:rPr>
+              <a:t>UNDERSTAND NOW</a:t>
+            </a:r>
+            <a:pPr indent="0" marL="0">
+              <a:buNone/>
+            </a:pPr>
+            <a:r>
+              <a:rPr lang="en-US" sz="1100" dirty="0">
+                <a:solidFill>
+                  <a:srgbClr val="075985"/>
+                </a:solidFill>
+                <a:latin typeface="Calibri" pitchFamily="34" charset="0"/>
+                <a:ea typeface="Calibri" pitchFamily="34" charset="-122"/>
+                <a:cs typeface="Calibri" pitchFamily="34" charset="-120"/>
+              </a:rPr>
+              <a:t> · algorithms</a:t>
+            </a:r>
+            <a:endParaRPr lang="en-US" sz="1100" dirty="0"/>
           </a:p>
         </p:txBody>
       </p:sp>
@@ -17346,9 +18538,59 @@
           </a:p>
         </p:txBody>
       </p:sp>
+      <p:sp>
+        <p:nvSpPr>
+          <p:cNvPr id="13" name="Shape 11"/>
+          <p:cNvSpPr/>
+          <p:nvPr/>
+        </p:nvSpPr>
+        <p:spPr>
+          <a:xfrm>
+            <a:off x="8484692" y="91440"/>
+            <a:ext cx="3158363" cy="274320"/>
+          </a:xfrm>
+          <a:prstGeom prst="rect">
+            <a:avLst/>
+          </a:prstGeom>
+          <a:solidFill>
+            <a:srgbClr val="E0F2FE"/>
+          </a:solidFill>
+          <a:ln w="12700">
+            <a:solidFill>
+              <a:srgbClr val="0369A1"/>
+            </a:solidFill>
+            <a:prstDash val="solid"/>
+          </a:ln>
+        </p:spPr>
+      </p:sp>
+      <p:sp>
+        <p:nvSpPr>
+          <p:cNvPr id="14" name="Shape 12"/>
+          <p:cNvSpPr/>
+          <p:nvPr/>
+        </p:nvSpPr>
+        <p:spPr>
+          <a:xfrm>
+            <a:off x="8484692" y="91440"/>
+            <a:ext cx="73152" cy="274320"/>
+          </a:xfrm>
+          <a:prstGeom prst="rect">
+            <a:avLst/>
+          </a:prstGeom>
+          <a:solidFill>
+            <a:srgbClr val="0369A1"/>
+          </a:solidFill>
+          <a:ln w="12700">
+            <a:solidFill>
+              <a:srgbClr val="0369A1"/>
+            </a:solidFill>
+            <a:prstDash val="solid"/>
+          </a:ln>
+        </p:spPr>
+      </p:sp>
       <p:pic>
         <p:nvPicPr>
-          <p:cNvPr id="14" name="Image 0" descr="preencoded.png">    </p:cNvPr>
+          <p:cNvPr id="15" name="Image 0" descr="preencoded.png">    </p:cNvPr>
           <p:cNvPicPr>
             <a:picLocks noChangeAspect="1"/>
           </p:cNvPicPr>
@@ -17356,6 +18598,83 @@
         </p:nvPicPr>
         <p:blipFill>
           <a:blip r:embed="rId1"/>
+          <a:stretch>
+            <a:fillRect/>
+          </a:stretch>
+        </p:blipFill>
+        <p:spPr>
+          <a:xfrm>
+            <a:off x="8612708" y="128016"/>
+            <a:ext cx="201168" cy="201168"/>
+          </a:xfrm>
+          <a:prstGeom prst="rect">
+            <a:avLst/>
+          </a:prstGeom>
+        </p:spPr>
+      </p:pic>
+      <p:sp>
+        <p:nvSpPr>
+          <p:cNvPr id="16" name="Text 13"/>
+          <p:cNvSpPr txBox="1"/>
+          <p:nvPr/>
+        </p:nvSpPr>
+        <p:spPr>
+          <a:xfrm>
+            <a:off x="8868740" y="91440"/>
+            <a:ext cx="2737739" cy="274320"/>
+          </a:xfrm>
+          <a:prstGeom prst="rect">
+            <a:avLst/>
+          </a:prstGeom>
+          <a:noFill/>
+          <a:ln/>
+        </p:spPr>
+        <p:txBody>
+          <a:bodyPr wrap="square" lIns="0" tIns="0" rIns="0" bIns="0" rtlCol="0" anchor="ctr"/>
+          <a:lstStyle/>
+          <a:p>
+            <a:pPr indent="0" marL="0">
+              <a:buNone/>
+            </a:pPr>
+            <a:r>
+              <a:rPr lang="en-US" sz="1100" b="1" dirty="0">
+                <a:solidFill>
+                  <a:srgbClr val="075985"/>
+                </a:solidFill>
+                <a:latin typeface="Calibri" pitchFamily="34" charset="0"/>
+                <a:ea typeface="Calibri" pitchFamily="34" charset="-122"/>
+                <a:cs typeface="Calibri" pitchFamily="34" charset="-120"/>
+              </a:rPr>
+              <a:t>UNDERSTAND NOW</a:t>
+            </a:r>
+            <a:pPr indent="0" marL="0">
+              <a:buNone/>
+            </a:pPr>
+            <a:r>
+              <a:rPr lang="en-US" sz="1100" dirty="0">
+                <a:solidFill>
+                  <a:srgbClr val="075985"/>
+                </a:solidFill>
+                <a:latin typeface="Calibri" pitchFamily="34" charset="0"/>
+                <a:ea typeface="Calibri" pitchFamily="34" charset="-122"/>
+                <a:cs typeface="Calibri" pitchFamily="34" charset="-120"/>
+              </a:rPr>
+              <a:t> · analog and digital</a:t>
+            </a:r>
+            <a:endParaRPr lang="en-US" sz="1100" dirty="0"/>
+          </a:p>
+        </p:txBody>
+      </p:sp>
+      <p:pic>
+        <p:nvPicPr>
+          <p:cNvPr id="18" name="Image 1" descr="preencoded.png">    </p:cNvPr>
+          <p:cNvPicPr>
+            <a:picLocks noChangeAspect="1"/>
+          </p:cNvPicPr>
+          <p:nvPr/>
+        </p:nvPicPr>
+        <p:blipFill>
+          <a:blip r:embed="rId2"/>
           <a:stretch>
             <a:fillRect/>
           </a:stretch>
@@ -19470,6 +20789,133 @@
               <a:t>n bits give 2^n patterns. The meaning of a pattern is a convention, not a property of the bits.</a:t>
             </a:r>
             <a:endParaRPr lang="en-US" sz="1500" dirty="0"/>
+          </a:p>
+        </p:txBody>
+      </p:sp>
+      <p:sp>
+        <p:nvSpPr>
+          <p:cNvPr id="5" name="Shape 2"/>
+          <p:cNvSpPr/>
+          <p:nvPr/>
+        </p:nvSpPr>
+        <p:spPr>
+          <a:xfrm>
+            <a:off x="8681669" y="91440"/>
+            <a:ext cx="2961386" cy="274320"/>
+          </a:xfrm>
+          <a:prstGeom prst="rect">
+            <a:avLst/>
+          </a:prstGeom>
+          <a:solidFill>
+            <a:srgbClr val="E0F2FE"/>
+          </a:solidFill>
+          <a:ln w="12700">
+            <a:solidFill>
+              <a:srgbClr val="0369A1"/>
+            </a:solidFill>
+            <a:prstDash val="solid"/>
+          </a:ln>
+        </p:spPr>
+      </p:sp>
+      <p:sp>
+        <p:nvSpPr>
+          <p:cNvPr id="6" name="Shape 3"/>
+          <p:cNvSpPr/>
+          <p:nvPr/>
+        </p:nvSpPr>
+        <p:spPr>
+          <a:xfrm>
+            <a:off x="8681669" y="91440"/>
+            <a:ext cx="73152" cy="274320"/>
+          </a:xfrm>
+          <a:prstGeom prst="rect">
+            <a:avLst/>
+          </a:prstGeom>
+          <a:solidFill>
+            <a:srgbClr val="0369A1"/>
+          </a:solidFill>
+          <a:ln w="12700">
+            <a:solidFill>
+              <a:srgbClr val="0369A1"/>
+            </a:solidFill>
+            <a:prstDash val="solid"/>
+          </a:ln>
+        </p:spPr>
+      </p:sp>
+      <p:pic>
+        <p:nvPicPr>
+          <p:cNvPr id="7" name="Image 0" descr="preencoded.png">    </p:cNvPr>
+          <p:cNvPicPr>
+            <a:picLocks noChangeAspect="1"/>
+          </p:cNvPicPr>
+          <p:nvPr/>
+        </p:nvPicPr>
+        <p:blipFill>
+          <a:blip r:embed="rId1"/>
+          <a:stretch>
+            <a:fillRect/>
+          </a:stretch>
+        </p:blipFill>
+        <p:spPr>
+          <a:xfrm>
+            <a:off x="8809685" y="128016"/>
+            <a:ext cx="201168" cy="201168"/>
+          </a:xfrm>
+          <a:prstGeom prst="rect">
+            <a:avLst/>
+          </a:prstGeom>
+        </p:spPr>
+      </p:pic>
+      <p:sp>
+        <p:nvSpPr>
+          <p:cNvPr id="8" name="Text 4"/>
+          <p:cNvSpPr txBox="1"/>
+          <p:nvPr/>
+        </p:nvSpPr>
+        <p:spPr>
+          <a:xfrm>
+            <a:off x="9065717" y="91440"/>
+            <a:ext cx="2540762" cy="274320"/>
+          </a:xfrm>
+          <a:prstGeom prst="rect">
+            <a:avLst/>
+          </a:prstGeom>
+          <a:noFill/>
+          <a:ln/>
+        </p:spPr>
+        <p:txBody>
+          <a:bodyPr wrap="square" lIns="0" tIns="0" rIns="0" bIns="0" rtlCol="0" anchor="ctr"/>
+          <a:lstStyle/>
+          <a:p>
+            <a:pPr indent="0" marL="0">
+              <a:buNone/>
+            </a:pPr>
+            <a:r>
+              <a:rPr lang="en-US" sz="1100" b="1" dirty="0">
+                <a:solidFill>
+                  <a:srgbClr val="075985"/>
+                </a:solidFill>
+                <a:latin typeface="Calibri" pitchFamily="34" charset="0"/>
+                <a:ea typeface="Calibri" pitchFamily="34" charset="-122"/>
+                <a:cs typeface="Calibri" pitchFamily="34" charset="-120"/>
+              </a:rPr>
+              <a:t>UNDERSTAND NOW</a:t>
+            </a:r>
+            <a:pPr indent="0" marL="0">
+              <a:buNone/>
+            </a:pPr>
+            <a:r>
+              <a:rPr lang="en-US" sz="1100" dirty="0">
+                <a:solidFill>
+                  <a:srgbClr val="075985"/>
+                </a:solidFill>
+                <a:latin typeface="Calibri" pitchFamily="34" charset="0"/>
+                <a:ea typeface="Calibri" pitchFamily="34" charset="-122"/>
+                <a:cs typeface="Calibri" pitchFamily="34" charset="-120"/>
+              </a:rPr>
+              <a:t> · bit, byte, word</a:t>
+            </a:r>
+            <a:endParaRPr lang="en-US" sz="1100" dirty="0"/>
           </a:p>
         </p:txBody>
       </p:sp>
@@ -23313,6 +24759,133 @@
       </p:graphicFrame>
       <p:sp>
         <p:nvSpPr>
+          <p:cNvPr id="4" name="Shape 1"/>
+          <p:cNvSpPr/>
+          <p:nvPr/>
+        </p:nvSpPr>
+        <p:spPr>
+          <a:xfrm>
+            <a:off x="8944305" y="91440"/>
+            <a:ext cx="2698750" cy="274320"/>
+          </a:xfrm>
+          <a:prstGeom prst="rect">
+            <a:avLst/>
+          </a:prstGeom>
+          <a:solidFill>
+            <a:srgbClr val="E0F2FE"/>
+          </a:solidFill>
+          <a:ln w="12700">
+            <a:solidFill>
+              <a:srgbClr val="0369A1"/>
+            </a:solidFill>
+            <a:prstDash val="solid"/>
+          </a:ln>
+        </p:spPr>
+      </p:sp>
+      <p:sp>
+        <p:nvSpPr>
+          <p:cNvPr id="5" name="Shape 2"/>
+          <p:cNvSpPr/>
+          <p:nvPr/>
+        </p:nvSpPr>
+        <p:spPr>
+          <a:xfrm>
+            <a:off x="8944305" y="91440"/>
+            <a:ext cx="73152" cy="274320"/>
+          </a:xfrm>
+          <a:prstGeom prst="rect">
+            <a:avLst/>
+          </a:prstGeom>
+          <a:solidFill>
+            <a:srgbClr val="0369A1"/>
+          </a:solidFill>
+          <a:ln w="12700">
+            <a:solidFill>
+              <a:srgbClr val="0369A1"/>
+            </a:solidFill>
+            <a:prstDash val="solid"/>
+          </a:ln>
+        </p:spPr>
+      </p:sp>
+      <p:pic>
+        <p:nvPicPr>
+          <p:cNvPr id="6" name="Image 0" descr="preencoded.png">    </p:cNvPr>
+          <p:cNvPicPr>
+            <a:picLocks noChangeAspect="1"/>
+          </p:cNvPicPr>
+          <p:nvPr/>
+        </p:nvPicPr>
+        <p:blipFill>
+          <a:blip r:embed="rId1"/>
+          <a:stretch>
+            <a:fillRect/>
+          </a:stretch>
+        </p:blipFill>
+        <p:spPr>
+          <a:xfrm>
+            <a:off x="9072321" y="128016"/>
+            <a:ext cx="201168" cy="201168"/>
+          </a:xfrm>
+          <a:prstGeom prst="rect">
+            <a:avLst/>
+          </a:prstGeom>
+        </p:spPr>
+      </p:pic>
+      <p:sp>
+        <p:nvSpPr>
+          <p:cNvPr id="7" name="Text 3"/>
+          <p:cNvSpPr txBox="1"/>
+          <p:nvPr/>
+        </p:nvSpPr>
+        <p:spPr>
+          <a:xfrm>
+            <a:off x="9328353" y="91440"/>
+            <a:ext cx="2278126" cy="274320"/>
+          </a:xfrm>
+          <a:prstGeom prst="rect">
+            <a:avLst/>
+          </a:prstGeom>
+          <a:noFill/>
+          <a:ln/>
+        </p:spPr>
+        <p:txBody>
+          <a:bodyPr wrap="square" lIns="0" tIns="0" rIns="0" bIns="0" rtlCol="0" anchor="ctr"/>
+          <a:lstStyle/>
+          <a:p>
+            <a:pPr indent="0" marL="0">
+              <a:buNone/>
+            </a:pPr>
+            <a:r>
+              <a:rPr lang="en-US" sz="1100" b="1" dirty="0">
+                <a:solidFill>
+                  <a:srgbClr val="075985"/>
+                </a:solidFill>
+                <a:latin typeface="Calibri" pitchFamily="34" charset="0"/>
+                <a:ea typeface="Calibri" pitchFamily="34" charset="-122"/>
+                <a:cs typeface="Calibri" pitchFamily="34" charset="-120"/>
+              </a:rPr>
+              <a:t>UNDERSTAND NOW</a:t>
+            </a:r>
+            <a:pPr indent="0" marL="0">
+              <a:buNone/>
+            </a:pPr>
+            <a:r>
+              <a:rPr lang="en-US" sz="1100" dirty="0">
+                <a:solidFill>
+                  <a:srgbClr val="075985"/>
+                </a:solidFill>
+                <a:latin typeface="Calibri" pitchFamily="34" charset="0"/>
+                <a:ea typeface="Calibri" pitchFamily="34" charset="-122"/>
+                <a:cs typeface="Calibri" pitchFamily="34" charset="-120"/>
+              </a:rPr>
+              <a:t> · hexadecimal</a:t>
+            </a:r>
+            <a:endParaRPr lang="en-US" sz="1100" dirty="0"/>
+          </a:p>
+        </p:txBody>
+      </p:sp>
+      <p:sp>
+        <p:nvSpPr>
           <p:cNvPr id="25" name="Slide Number Placeholder 0"/>
           <p:cNvSpPr>
             <a:spLocks noGrp="1"/>
@@ -24594,6 +26167,133 @@
       </p:sp>
       <p:sp>
         <p:nvSpPr>
+          <p:cNvPr id="32" name="Shape 30"/>
+          <p:cNvSpPr/>
+          <p:nvPr/>
+        </p:nvSpPr>
+        <p:spPr>
+          <a:xfrm>
+            <a:off x="8419033" y="91440"/>
+            <a:ext cx="3224022" cy="274320"/>
+          </a:xfrm>
+          <a:prstGeom prst="rect">
+            <a:avLst/>
+          </a:prstGeom>
+          <a:solidFill>
+            <a:srgbClr val="E0F2FE"/>
+          </a:solidFill>
+          <a:ln w="12700">
+            <a:solidFill>
+              <a:srgbClr val="0369A1"/>
+            </a:solidFill>
+            <a:prstDash val="solid"/>
+          </a:ln>
+        </p:spPr>
+      </p:sp>
+      <p:sp>
+        <p:nvSpPr>
+          <p:cNvPr id="33" name="Shape 31"/>
+          <p:cNvSpPr/>
+          <p:nvPr/>
+        </p:nvSpPr>
+        <p:spPr>
+          <a:xfrm>
+            <a:off x="8419033" y="91440"/>
+            <a:ext cx="73152" cy="274320"/>
+          </a:xfrm>
+          <a:prstGeom prst="rect">
+            <a:avLst/>
+          </a:prstGeom>
+          <a:solidFill>
+            <a:srgbClr val="0369A1"/>
+          </a:solidFill>
+          <a:ln w="12700">
+            <a:solidFill>
+              <a:srgbClr val="0369A1"/>
+            </a:solidFill>
+            <a:prstDash val="solid"/>
+          </a:ln>
+        </p:spPr>
+      </p:sp>
+      <p:pic>
+        <p:nvPicPr>
+          <p:cNvPr id="34" name="Image 0" descr="preencoded.png">    </p:cNvPr>
+          <p:cNvPicPr>
+            <a:picLocks noChangeAspect="1"/>
+          </p:cNvPicPr>
+          <p:nvPr/>
+        </p:nvPicPr>
+        <p:blipFill>
+          <a:blip r:embed="rId1"/>
+          <a:stretch>
+            <a:fillRect/>
+          </a:stretch>
+        </p:blipFill>
+        <p:spPr>
+          <a:xfrm>
+            <a:off x="8547049" y="128016"/>
+            <a:ext cx="201168" cy="201168"/>
+          </a:xfrm>
+          <a:prstGeom prst="rect">
+            <a:avLst/>
+          </a:prstGeom>
+        </p:spPr>
+      </p:pic>
+      <p:sp>
+        <p:nvSpPr>
+          <p:cNvPr id="35" name="Text 32"/>
+          <p:cNvSpPr txBox="1"/>
+          <p:nvPr/>
+        </p:nvSpPr>
+        <p:spPr>
+          <a:xfrm>
+            <a:off x="8803081" y="91440"/>
+            <a:ext cx="2803398" cy="274320"/>
+          </a:xfrm>
+          <a:prstGeom prst="rect">
+            <a:avLst/>
+          </a:prstGeom>
+          <a:noFill/>
+          <a:ln/>
+        </p:spPr>
+        <p:txBody>
+          <a:bodyPr wrap="square" lIns="0" tIns="0" rIns="0" bIns="0" rtlCol="0" anchor="ctr"/>
+          <a:lstStyle/>
+          <a:p>
+            <a:pPr indent="0" marL="0">
+              <a:buNone/>
+            </a:pPr>
+            <a:r>
+              <a:rPr lang="en-US" sz="1100" b="1" dirty="0">
+                <a:solidFill>
+                  <a:srgbClr val="075985"/>
+                </a:solidFill>
+                <a:latin typeface="Calibri" pitchFamily="34" charset="0"/>
+                <a:ea typeface="Calibri" pitchFamily="34" charset="-122"/>
+                <a:cs typeface="Calibri" pitchFamily="34" charset="-120"/>
+              </a:rPr>
+              <a:t>UNDERSTAND NOW</a:t>
+            </a:r>
+            <a:pPr indent="0" marL="0">
+              <a:buNone/>
+            </a:pPr>
+            <a:r>
+              <a:rPr lang="en-US" sz="1100" dirty="0">
+                <a:solidFill>
+                  <a:srgbClr val="075985"/>
+                </a:solidFill>
+                <a:latin typeface="Calibri" pitchFamily="34" charset="0"/>
+                <a:ea typeface="Calibri" pitchFamily="34" charset="-122"/>
+                <a:cs typeface="Calibri" pitchFamily="34" charset="-120"/>
+              </a:rPr>
+              <a:t> · positional notation</a:t>
+            </a:r>
+            <a:endParaRPr lang="en-US" sz="1100" dirty="0"/>
+          </a:p>
+        </p:txBody>
+      </p:sp>
+      <p:sp>
+        <p:nvSpPr>
           <p:cNvPr id="25" name="Slide Number Placeholder 0"/>
           <p:cNvSpPr>
             <a:spLocks noGrp="1"/>
@@ -25482,6 +27182,133 @@
       </p:sp>
       <p:sp>
         <p:nvSpPr>
+          <p:cNvPr id="24" name="Shape 22"/>
+          <p:cNvSpPr/>
+          <p:nvPr/>
+        </p:nvSpPr>
+        <p:spPr>
+          <a:xfrm>
+            <a:off x="8944305" y="91440"/>
+            <a:ext cx="2698750" cy="274320"/>
+          </a:xfrm>
+          <a:prstGeom prst="rect">
+            <a:avLst/>
+          </a:prstGeom>
+          <a:solidFill>
+            <a:srgbClr val="E0F2FE"/>
+          </a:solidFill>
+          <a:ln w="12700">
+            <a:solidFill>
+              <a:srgbClr val="0369A1"/>
+            </a:solidFill>
+            <a:prstDash val="solid"/>
+          </a:ln>
+        </p:spPr>
+      </p:sp>
+      <p:sp>
+        <p:nvSpPr>
+          <p:cNvPr id="25" name="Shape 23"/>
+          <p:cNvSpPr/>
+          <p:nvPr/>
+        </p:nvSpPr>
+        <p:spPr>
+          <a:xfrm>
+            <a:off x="8944305" y="91440"/>
+            <a:ext cx="73152" cy="274320"/>
+          </a:xfrm>
+          <a:prstGeom prst="rect">
+            <a:avLst/>
+          </a:prstGeom>
+          <a:solidFill>
+            <a:srgbClr val="0369A1"/>
+          </a:solidFill>
+          <a:ln w="12700">
+            <a:solidFill>
+              <a:srgbClr val="0369A1"/>
+            </a:solidFill>
+            <a:prstDash val="solid"/>
+          </a:ln>
+        </p:spPr>
+      </p:sp>
+      <p:pic>
+        <p:nvPicPr>
+          <p:cNvPr id="26" name="Image 0" descr="preencoded.png">    </p:cNvPr>
+          <p:cNvPicPr>
+            <a:picLocks noChangeAspect="1"/>
+          </p:cNvPicPr>
+          <p:nvPr/>
+        </p:nvPicPr>
+        <p:blipFill>
+          <a:blip r:embed="rId1"/>
+          <a:stretch>
+            <a:fillRect/>
+          </a:stretch>
+        </p:blipFill>
+        <p:spPr>
+          <a:xfrm>
+            <a:off x="9072321" y="128016"/>
+            <a:ext cx="201168" cy="201168"/>
+          </a:xfrm>
+          <a:prstGeom prst="rect">
+            <a:avLst/>
+          </a:prstGeom>
+        </p:spPr>
+      </p:pic>
+      <p:sp>
+        <p:nvSpPr>
+          <p:cNvPr id="27" name="Text 24"/>
+          <p:cNvSpPr txBox="1"/>
+          <p:nvPr/>
+        </p:nvSpPr>
+        <p:spPr>
+          <a:xfrm>
+            <a:off x="9328353" y="91440"/>
+            <a:ext cx="2278126" cy="274320"/>
+          </a:xfrm>
+          <a:prstGeom prst="rect">
+            <a:avLst/>
+          </a:prstGeom>
+          <a:noFill/>
+          <a:ln/>
+        </p:spPr>
+        <p:txBody>
+          <a:bodyPr wrap="square" lIns="0" tIns="0" rIns="0" bIns="0" rtlCol="0" anchor="ctr"/>
+          <a:lstStyle/>
+          <a:p>
+            <a:pPr indent="0" marL="0">
+              <a:buNone/>
+            </a:pPr>
+            <a:r>
+              <a:rPr lang="en-US" sz="1100" b="1" dirty="0">
+                <a:solidFill>
+                  <a:srgbClr val="075985"/>
+                </a:solidFill>
+                <a:latin typeface="Calibri" pitchFamily="34" charset="0"/>
+                <a:ea typeface="Calibri" pitchFamily="34" charset="-122"/>
+                <a:cs typeface="Calibri" pitchFamily="34" charset="-120"/>
+              </a:rPr>
+              <a:t>UNDERSTAND NOW</a:t>
+            </a:r>
+            <a:pPr indent="0" marL="0">
+              <a:buNone/>
+            </a:pPr>
+            <a:r>
+              <a:rPr lang="en-US" sz="1100" dirty="0">
+                <a:solidFill>
+                  <a:srgbClr val="075985"/>
+                </a:solidFill>
+                <a:latin typeface="Calibri" pitchFamily="34" charset="0"/>
+                <a:ea typeface="Calibri" pitchFamily="34" charset="-122"/>
+                <a:cs typeface="Calibri" pitchFamily="34" charset="-120"/>
+              </a:rPr>
+              <a:t> · hexadecimal</a:t>
+            </a:r>
+            <a:endParaRPr lang="en-US" sz="1100" dirty="0"/>
+          </a:p>
+        </p:txBody>
+      </p:sp>
+      <p:sp>
+        <p:nvSpPr>
           <p:cNvPr id="25" name="Slide Number Placeholder 0"/>
           <p:cNvSpPr>
             <a:spLocks noGrp="1"/>
@@ -27030,6 +28857,133 @@
               <a:t>Sixteen bits, three fields. The same sixteen bits could be a number, two characters or half an instruction: the meaning is in how the program uses them.</a:t>
             </a:r>
             <a:endParaRPr lang="en-US" sz="1600" dirty="0"/>
+          </a:p>
+        </p:txBody>
+      </p:sp>
+      <p:sp>
+        <p:nvSpPr>
+          <p:cNvPr id="41" name="Shape 39"/>
+          <p:cNvSpPr/>
+          <p:nvPr/>
+        </p:nvSpPr>
+        <p:spPr>
+          <a:xfrm>
+            <a:off x="8353374" y="91440"/>
+            <a:ext cx="3289681" cy="274320"/>
+          </a:xfrm>
+          <a:prstGeom prst="rect">
+            <a:avLst/>
+          </a:prstGeom>
+          <a:solidFill>
+            <a:srgbClr val="E0F2FE"/>
+          </a:solidFill>
+          <a:ln w="12700">
+            <a:solidFill>
+              <a:srgbClr val="0369A1"/>
+            </a:solidFill>
+            <a:prstDash val="solid"/>
+          </a:ln>
+        </p:spPr>
+      </p:sp>
+      <p:sp>
+        <p:nvSpPr>
+          <p:cNvPr id="42" name="Shape 40"/>
+          <p:cNvSpPr/>
+          <p:nvPr/>
+        </p:nvSpPr>
+        <p:spPr>
+          <a:xfrm>
+            <a:off x="8353374" y="91440"/>
+            <a:ext cx="73152" cy="274320"/>
+          </a:xfrm>
+          <a:prstGeom prst="rect">
+            <a:avLst/>
+          </a:prstGeom>
+          <a:solidFill>
+            <a:srgbClr val="0369A1"/>
+          </a:solidFill>
+          <a:ln w="12700">
+            <a:solidFill>
+              <a:srgbClr val="0369A1"/>
+            </a:solidFill>
+            <a:prstDash val="solid"/>
+          </a:ln>
+        </p:spPr>
+      </p:sp>
+      <p:pic>
+        <p:nvPicPr>
+          <p:cNvPr id="43" name="Image 0" descr="preencoded.png">    </p:cNvPr>
+          <p:cNvPicPr>
+            <a:picLocks noChangeAspect="1"/>
+          </p:cNvPicPr>
+          <p:nvPr/>
+        </p:nvPicPr>
+        <p:blipFill>
+          <a:blip r:embed="rId1"/>
+          <a:stretch>
+            <a:fillRect/>
+          </a:stretch>
+        </p:blipFill>
+        <p:spPr>
+          <a:xfrm>
+            <a:off x="8481390" y="128016"/>
+            <a:ext cx="201168" cy="201168"/>
+          </a:xfrm>
+          <a:prstGeom prst="rect">
+            <a:avLst/>
+          </a:prstGeom>
+        </p:spPr>
+      </p:pic>
+      <p:sp>
+        <p:nvSpPr>
+          <p:cNvPr id="44" name="Text 41"/>
+          <p:cNvSpPr txBox="1"/>
+          <p:nvPr/>
+        </p:nvSpPr>
+        <p:spPr>
+          <a:xfrm>
+            <a:off x="8737422" y="91440"/>
+            <a:ext cx="2869057" cy="274320"/>
+          </a:xfrm>
+          <a:prstGeom prst="rect">
+            <a:avLst/>
+          </a:prstGeom>
+          <a:noFill/>
+          <a:ln/>
+        </p:spPr>
+        <p:txBody>
+          <a:bodyPr wrap="square" lIns="0" tIns="0" rIns="0" bIns="0" rtlCol="0" anchor="ctr"/>
+          <a:lstStyle/>
+          <a:p>
+            <a:pPr indent="0" marL="0">
+              <a:buNone/>
+            </a:pPr>
+            <a:r>
+              <a:rPr lang="en-US" sz="1100" b="1" dirty="0">
+                <a:solidFill>
+                  <a:srgbClr val="075985"/>
+                </a:solidFill>
+                <a:latin typeface="Calibri" pitchFamily="34" charset="0"/>
+                <a:ea typeface="Calibri" pitchFamily="34" charset="-122"/>
+                <a:cs typeface="Calibri" pitchFamily="34" charset="-120"/>
+              </a:rPr>
+              <a:t>UNDERSTAND NOW</a:t>
+            </a:r>
+            <a:pPr indent="0" marL="0">
+              <a:buNone/>
+            </a:pPr>
+            <a:r>
+              <a:rPr lang="en-US" sz="1100" dirty="0">
+                <a:solidFill>
+                  <a:srgbClr val="075985"/>
+                </a:solidFill>
+                <a:latin typeface="Calibri" pitchFamily="34" charset="0"/>
+                <a:ea typeface="Calibri" pitchFamily="34" charset="-122"/>
+                <a:cs typeface="Calibri" pitchFamily="34" charset="-120"/>
+              </a:rPr>
+              <a:t> · a colour is a number</a:t>
+            </a:r>
+            <a:endParaRPr lang="en-US" sz="1100" dirty="0"/>
           </a:p>
         </p:txBody>
       </p:sp>
@@ -29574,6 +31528,133 @@
           </a:graphicData>
         </a:graphic>
       </p:graphicFrame>
+      <p:sp>
+        <p:nvSpPr>
+          <p:cNvPr id="4" name="Shape 1"/>
+          <p:cNvSpPr/>
+          <p:nvPr/>
+        </p:nvSpPr>
+        <p:spPr>
+          <a:xfrm>
+            <a:off x="8222056" y="91440"/>
+            <a:ext cx="3420999" cy="274320"/>
+          </a:xfrm>
+          <a:prstGeom prst="rect">
+            <a:avLst/>
+          </a:prstGeom>
+          <a:solidFill>
+            <a:srgbClr val="E0F2FE"/>
+          </a:solidFill>
+          <a:ln w="12700">
+            <a:solidFill>
+              <a:srgbClr val="0369A1"/>
+            </a:solidFill>
+            <a:prstDash val="solid"/>
+          </a:ln>
+        </p:spPr>
+      </p:sp>
+      <p:sp>
+        <p:nvSpPr>
+          <p:cNvPr id="5" name="Shape 2"/>
+          <p:cNvSpPr/>
+          <p:nvPr/>
+        </p:nvSpPr>
+        <p:spPr>
+          <a:xfrm>
+            <a:off x="8222056" y="91440"/>
+            <a:ext cx="73152" cy="274320"/>
+          </a:xfrm>
+          <a:prstGeom prst="rect">
+            <a:avLst/>
+          </a:prstGeom>
+          <a:solidFill>
+            <a:srgbClr val="0369A1"/>
+          </a:solidFill>
+          <a:ln w="12700">
+            <a:solidFill>
+              <a:srgbClr val="0369A1"/>
+            </a:solidFill>
+            <a:prstDash val="solid"/>
+          </a:ln>
+        </p:spPr>
+      </p:sp>
+      <p:pic>
+        <p:nvPicPr>
+          <p:cNvPr id="6" name="Image 0" descr="preencoded.png">    </p:cNvPr>
+          <p:cNvPicPr>
+            <a:picLocks noChangeAspect="1"/>
+          </p:cNvPicPr>
+          <p:nvPr/>
+        </p:nvPicPr>
+        <p:blipFill>
+          <a:blip r:embed="rId1"/>
+          <a:stretch>
+            <a:fillRect/>
+          </a:stretch>
+        </p:blipFill>
+        <p:spPr>
+          <a:xfrm>
+            <a:off x="8350072" y="128016"/>
+            <a:ext cx="201168" cy="201168"/>
+          </a:xfrm>
+          <a:prstGeom prst="rect">
+            <a:avLst/>
+          </a:prstGeom>
+        </p:spPr>
+      </p:pic>
+      <p:sp>
+        <p:nvSpPr>
+          <p:cNvPr id="7" name="Text 3"/>
+          <p:cNvSpPr txBox="1"/>
+          <p:nvPr/>
+        </p:nvSpPr>
+        <p:spPr>
+          <a:xfrm>
+            <a:off x="8606104" y="91440"/>
+            <a:ext cx="3000375" cy="274320"/>
+          </a:xfrm>
+          <a:prstGeom prst="rect">
+            <a:avLst/>
+          </a:prstGeom>
+          <a:noFill/>
+          <a:ln/>
+        </p:spPr>
+        <p:txBody>
+          <a:bodyPr wrap="square" lIns="0" tIns="0" rIns="0" bIns="0" rtlCol="0" anchor="ctr"/>
+          <a:lstStyle/>
+          <a:p>
+            <a:pPr indent="0" marL="0">
+              <a:buNone/>
+            </a:pPr>
+            <a:r>
+              <a:rPr lang="en-US" sz="1100" b="1" dirty="0">
+                <a:solidFill>
+                  <a:srgbClr val="075985"/>
+                </a:solidFill>
+                <a:latin typeface="Calibri" pitchFamily="34" charset="0"/>
+                <a:ea typeface="Calibri" pitchFamily="34" charset="-122"/>
+                <a:cs typeface="Calibri" pitchFamily="34" charset="-120"/>
+              </a:rPr>
+              <a:t>UNDERSTAND NOW</a:t>
+            </a:r>
+            <a:pPr indent="0" marL="0">
+              <a:buNone/>
+            </a:pPr>
+            <a:r>
+              <a:rPr lang="en-US" sz="1100" dirty="0">
+                <a:solidFill>
+                  <a:srgbClr val="075985"/>
+                </a:solidFill>
+                <a:latin typeface="Calibri" pitchFamily="34" charset="0"/>
+                <a:ea typeface="Calibri" pitchFamily="34" charset="-122"/>
+                <a:cs typeface="Calibri" pitchFamily="34" charset="-120"/>
+              </a:rPr>
+              <a:t> · characters and strings</a:t>
+            </a:r>
+            <a:endParaRPr lang="en-US" sz="1100" dirty="0"/>
+          </a:p>
+        </p:txBody>
+      </p:sp>
       <p:sp>
         <p:nvSpPr>
           <p:cNvPr id="25" name="Slide Number Placeholder 0"/>

--- a/en/slides/04-Computer_Architecture-Digital_Information.pptx
+++ b/en/slides/04-Computer_Architecture-Digital_Information.pptx
@@ -126,13 +126,13 @@
   <p:extLst>
     <p:ext uri="{521415D9-36F7-43E2-AB2F-B90AF26B5E84}">
       <p14:sectionLst xmlns:p14="http://schemas.microsoft.com/office/powerpoint/2010/main">
-        <p14:section name="Opening" id="{d5bb5230-8c9b-2b98-0c63-d19a286ff424}">
+        <p14:section name="Opening" id="{cb4cac61-677e-6ce3-0383-750c397e464c}">
           <p14:sldIdLst>
             <p14:sldId id="256"/>
             <p14:sldId id="257"/>
           </p14:sldIdLst>
         </p14:section>
-        <p14:section name="Information" id="{49f7cfee-bd13-00e4-959f-32c188d7ba4d}">
+        <p14:section name="Information" id="{a0f0bd67-833f-45e8-2a43-bc73d697f628}">
           <p14:sldIdLst>
             <p14:sldId id="258"/>
             <p14:sldId id="259"/>
@@ -142,7 +142,7 @@
             <p14:sldId id="263"/>
           </p14:sldIdLst>
         </p14:section>
-        <p14:section name="Text" id="{fa8d7487-c233-c91d-2e18-ce95979ca49f}">
+        <p14:section name="Text" id="{4c721943-092d-764e-f57b-965d132f10a6}">
           <p14:sldIdLst>
             <p14:sldId id="264"/>
             <p14:sldId id="265"/>
@@ -150,12 +150,12 @@
             <p14:sldId id="267"/>
           </p14:sldIdLst>
         </p14:section>
-        <p14:section name="Data structures" id="{e2811c50-2fd5-358d-38a3-f3d35e6fea74}">
+        <p14:section name="Data structures" id="{87de8b14-39f1-f82d-38e5-fe9693b1ce82}">
           <p14:sldIdLst>
             <p14:sldId id="268"/>
           </p14:sldIdLst>
         </p14:section>
-        <p14:section name="Data and algorithms" id="{ddd8e2fa-135f-e279-127b-7601e2e02901}">
+        <p14:section name="Data and algorithms" id="{63e04017-d331-a3cf-8c75-44dccf9ee4ed}">
           <p14:sldIdLst>
             <p14:sldId id="269"/>
             <p14:sldId id="270"/>

--- a/en/slides/04-Computer_Architecture-Digital_Information.pptx
+++ b/en/slides/04-Computer_Architecture-Digital_Information.pptx
@@ -126,13 +126,13 @@
   <p:extLst>
     <p:ext uri="{521415D9-36F7-43E2-AB2F-B90AF26B5E84}">
       <p14:sectionLst xmlns:p14="http://schemas.microsoft.com/office/powerpoint/2010/main">
-        <p14:section name="Opening" id="{cb4cac61-677e-6ce3-0383-750c397e464c}">
+        <p14:section name="Opening" id="{a4d71d49-6c0d-7e06-6207-0d8d4c7ae1fd}">
           <p14:sldIdLst>
             <p14:sldId id="256"/>
             <p14:sldId id="257"/>
           </p14:sldIdLst>
         </p14:section>
-        <p14:section name="Information" id="{a0f0bd67-833f-45e8-2a43-bc73d697f628}">
+        <p14:section name="Information" id="{4310f838-6dc9-2a10-a85d-83afeb74bf96}">
           <p14:sldIdLst>
             <p14:sldId id="258"/>
             <p14:sldId id="259"/>
@@ -142,7 +142,7 @@
             <p14:sldId id="263"/>
           </p14:sldIdLst>
         </p14:section>
-        <p14:section name="Text" id="{4c721943-092d-764e-f57b-965d132f10a6}">
+        <p14:section name="Text" id="{e26dc81c-f826-3a8c-f555-84e207cbda76}">
           <p14:sldIdLst>
             <p14:sldId id="264"/>
             <p14:sldId id="265"/>
@@ -150,12 +150,12 @@
             <p14:sldId id="267"/>
           </p14:sldIdLst>
         </p14:section>
-        <p14:section name="Data structures" id="{87de8b14-39f1-f82d-38e5-fe9693b1ce82}">
+        <p14:section name="Data structures" id="{0ddb3583-0fe7-cf98-4070-c8e64ec490af}">
           <p14:sldIdLst>
             <p14:sldId id="268"/>
           </p14:sldIdLst>
         </p14:section>
-        <p14:section name="Data and algorithms" id="{63e04017-d331-a3cf-8c75-44dccf9ee4ed}">
+        <p14:section name="Data and algorithms" id="{57b554ee-66c5-77ea-4780-7cc5dfe6a9ac}">
           <p14:sldIdLst>
             <p14:sldId id="269"/>
             <p14:sldId id="270"/>
@@ -570,7 +570,7 @@
           <a:p>
             <a:r>
               <a:rPr lang="en-US" dirty="0"/>
-              <a:t>In Lecture 02 you typed 0x07e0, 255, .asciz and .word without knowing exactly what they were. This lecture gives them names. Its thesis is in the subtitle: everything inside the machine is a pattern of bits, whether it is a number, a colour, a letter or a list. The lecture is wide rather than deep: numbers are treated formally in the next two lectures; here you learn to read bits and to see that their meaning is a matter of agreement.
+              <a:t>In Lecture 02 the student wrote 0x07e0, 255, .asciz and .word without knowing precisely what they denoted. This lecture names them. Its thesis is stated in the subtitle: everything inside the machine is a pattern of bits, whether a number, a colour, a letter or a list, and the meaning of a pattern is fixed by convention, not by the bits themselves. The lecture favours breadth over depth: the representation of numbers is treated formally in the next two lectures, while here the aim is to learn to read bits and to recognise that interpretation is an agreement.
 Learning status: UNDERSTAND NOW, by the end of this lecture you explain it, trace it and apply it on your own; USE NOW, you follow and use the recipe today; how it works inside is explained later, or is not part of the course; UNDERSTAND LATER, recognise the name and what it is for; a later lecture explains it. A slide without a badge is context: a story, an example, a question, an exercise.
 Learning status of this lecture. UNDERSTAND NOW: analog and digital; bit, byte, word; hexadecimal; positional notation; a colour is a number; characters and strings; little-endian byte order; data structures; arrays in memory; algorithms. USE NOW: shifts as multiplications (Lecture 05) and, used without being studied in this course, the complete program, the PRG32 tools. UNDERSTAND LATER: nothing. A slide without a badge is context: a story, an example, a question, an exercise.
 For the lecturer: Spiral: the students have already seen 0x07e0, 255, .asciz and .word in Lecture 02. This lecture names what those were. The next two lectures (05, 06) treat numbers formally.</a:t>
@@ -661,7 +661,7 @@
           <a:p>
             <a:r>
               <a:rPr lang="en-US" dirty="0"/>
-              <a:t>A string is a sequence of character codes in consecutive bytes. The problem is how to know where it ends. The C convention marks the end with a zero byte; the Pascal convention writes the length first. The third row is your string of Lecture 02: .asciz stores the eleven characters of HELLO PRG32 followed by a zero, twelve bytes in all. The function that draws text receives only the address of the first byte and reads until it finds the zero. If the zero were missing, it would continue with whatever follows in memory.
+              <a:t>A string is a sequence of character codes stored in consecutive bytes, and the design question is how its end is marked. The C convention places a zero byte at the end; the Pascal convention stores the length first. The third row is the string of Lecture 02: .asciz stores the eleven characters of HELLO PRG32 followed by a zero, twelve bytes in total. The text-drawing function receives only the address of the first byte and reads until it meets the zero. Were the terminator missing, it would continue into whatever happens to follow in memory, an error with a long history in computer security.
 UNDERSTAND NOW: characters and strings.
 For the lecturer: The numbers under the cells are the ASCII codes in hexadecimal. This is the string of Lecture 02, step 2. What happens if the zero is missing? The function keeps reading whatever follows in memory.</a:t>
             </a:r>
@@ -751,7 +751,7 @@
           <a:p>
             <a:r>
               <a:rPr lang="en-US" dirty="0"/>
-              <a:t>ASCII has 128 characters, enough for English only. Unicode assigns a number, called a code point, to every character of every writing system. UTF-8 stores that number in one to four bytes: the characters of ASCII keep their single byte, an accented letter takes two, the euro sign three, an emoji four. Two consequences. Plain ASCII text is already valid UTF-8. And the length of a string in bytes is no longer its length in characters.
+              <a:t>ASCII defines 128 characters, sufficient for English alone. Unicode assigns a number, the code point, to every character of every writing system. UTF-8 encodes that number in one to four bytes: ASCII characters retain their single byte, an accented letter takes two, the euro sign three, an emoji four. Two consequences follow. Pure ASCII text is already valid UTF-8, which explains the encoding's universal adoption. And the length of a string in bytes no longer equals its length in characters.
 UNDERSTAND NOW: characters and strings.
 For the lecturer: Unicode assigns a number (code point) to every character of every script; UTF-8 encodes that number in one to four bytes and is compatible with ASCII. It is the encoding of the web and of your source files. Consequence: the length of a string in bytes is not its length in characters.</a:t>
             </a:r>
@@ -841,7 +841,7 @@
           <a:p>
             <a:r>
               <a:rPr lang="en-US" dirty="0"/>
-              <a:t>A word is four bytes, and memory has one address per byte: in which order are the four bytes stored? RISC-V is little-endian: the least significant byte goes at the lowest address, so 0x12345678 is stored as 78, 56, 34, 12. The opposite order, big-endian, is used by network protocols. Normally you do not notice, because lw and sw are consistent with each other. You notice when you look at memory byte by byte in a debugger, or exchange data with a different machine.
+              <a:t>A word occupies four bytes and memory assigns one address to each byte, so the order in which the bytes are stored must be specified. RISC-V is little-endian: the least significant byte occupies the lowest address, so 0x12345678 is stored as 78, 56, 34, 12. The opposite convention, big-endian, is used by network protocols. In ordinary use the order is invisible, because lw and sw are mutually consistent; it becomes visible when memory is inspected byte by byte in a debugger, or when data are exchanged with a machine of different convention. Lecture 15 returns to the question and turns it into an experiment.
 UNDERSTAND NOW: little-endian byte order.
 For the lecturer: The names come from Gulliver's Travels: which end of the egg to break first. In PRG32-QT, open the memory view on a .word and read the bytes.</a:t>
             </a:r>
@@ -931,7 +931,7 @@
           <a:p>
             <a:r>
               <a:rPr lang="en-US" dirty="0"/>
-              <a:t>Five structures. An array keeps elements of the same type one after another and reaches them by index. A list links each element to the next: easy to modify, slow to reach by position. A stack returns first what was put in last; you used one in Lecture 02 to save ra. A dictionary associates keys with values. A tree is a hierarchy. The sixth card is the one that matters for this course: in the machine all of them are bytes in memory, plus a rule for finding the next element.
+              <a:t>Five ways to organise data. An array stores elements of the same type contiguously and reaches them by index. A list links each element to the next: cheap to modify, slow to access by position. A stack returns first the element inserted last, and was already used in Lecture 02 to save ra. A dictionary associates keys with values. A tree organises elements hierarchically. The sixth card states the point most relevant to this course: within the machine, every one of these structures is a set of bytes in memory together with a rule for locating the next element.
 UNDERSTAND NOW: data structures.
 For the lecturer: You have already used a stack: the frame that saved ra in Lecture 02. The examples are those drawn on the source slide.</a:t>
             </a:r>
@@ -1021,7 +1021,7 @@
           <a:p>
             <a:r>
               <a:rPr lang="en-US" dirty="0"/>
-              <a:t>A problem is computable if an algorithm can solve it. The Turing machine is the mathematical model of a computer with a program; the von Neumann machine is the architecture that realises it in hardware. The last line is the surprising one: there are problems that no algorithm can solve, and therefore that no computer will ever solve, however fast. The classic example is deciding, for any program, whether it will stop.
+              <a:t>A problem is computable if some algorithm solves it. The Turing machine is the mathematical model of a programmed computer; the von Neumann machine is the architecture that realises it in hardware. The final line is the striking one: there exist problems that no algorithm can solve, and hence that no computer will ever solve, however fast. The classic example is the halting problem, deciding for an arbitrary program whether it will terminate, which Turing proved undecidable in 1936.
 UNDERSTAND NOW: algorithms.
 For the lecturer: The last line is the Church-Turing thesis, stated informally. The halting problem is the classic example of a problem that is not computable.</a:t>
             </a:r>
@@ -1111,7 +1111,7 @@
           <a:p>
             <a:r>
               <a:rPr lang="en-US" dirty="0"/>
-              <a:t>In a deterministic algorithm the same input always produces the same sequence of steps and the same result: first_update always adds one. A non-deterministic algorithm can behave differently at each run with the same input. There are two common reasons: it uses random numbers on purpose, like a game that places an enemy at random, or it depends on the timing of several things that happen together. The first kind is useful; the second is a frequent source of bugs.
+              <a:t>A deterministic algorithm, given the same input, always performs the same sequence of steps and produces the same result: first_update always adds one. A non-deterministic algorithm may behave differently on different runs with the same input. Two causes are common. The algorithm may use random numbers deliberately, as a game that places an enemy at random does; or its behaviour may depend on the relative timing of concurrent events. The first kind is a design choice of great utility, as probabilistic primality tests show; the second is a frequent source of errors that are difficult to reproduce.
 UNDERSTAND NOW: algorithms.</a:t>
             </a:r>
             <a:endParaRPr lang="en-US" dirty="0"/>
@@ -1200,7 +1200,7 @@
           <a:p>
             <a:r>
               <a:rPr lang="en-US" dirty="0"/>
-              <a:t>A classical program is a function written by a person: y = f(x). In machine learning the function is not written: it is built automatically from examples. Today's generative models are this idea at an enormous scale, with billions of learned numbers. Two remarks connect it to this course. Those numbers are bits in memory, multiplied and added by processors. And a model can be wrong with great confidence: only someone who knows the fundamentals can check what it says.
+              <a:t>A classical program is a function written by a person: y = f(x). In machine learning the function is not written but constructed automatically from examples. Contemporary generative models apply this idea at enormous scale, with billions of learned parameters. Two remarks connect the topic to this course. Those parameters are bits in memory, multiplied and added by processors of the kind studied here. And a model may be wrong with great confidence: only someone who understands the fundamentals is in a position to verify what it asserts.
 For the lecturer: The last point connects to the #nogpt rule of the course: the exam checks that the fundamentals are in the student's head.</a:t>
             </a:r>
             <a:endParaRPr lang="en-US" dirty="0"/>
@@ -1289,8 +1289,8 @@
           <a:p>
             <a:r>
               <a:rPr lang="en-US" dirty="0"/>
-              <a:t>Apply the rule that n bits give 2 to the n patterns. A byte has eight bits. Be careful with the two near-misses: 8 is the number of bits, and 255 is the largest natural number that a byte can hold, not the number of values, because zero counts too.
-Write the four hexadecimal digits in binary: F is 1111, 8 is 1000, 1 is 0001, F is 1111. Then cut the sixteen bits as 5, 6 and 5: red 11111, green 000000, blue 11111. Red and blue at maximum, no green.
+              <a:t>The first question applies the rule that n bits give 2^n patterns, to a byte of eight bits. Two near-misses deserve attention: 8 is the number of bits, and 255 is the largest natural number a byte can hold, not the number of values, since zero must also be counted.
+For the second, the four hexadecimal digits are written in binary, F as 1111, 8 as 1000, 1 as 0001, F as 1111, and the sixteen bits are divided as 5, 6 and 5: red 11111, green 000000, blue 11111. Red and blue are at maximum and green is absent.
 For the lecturer: 1. Answer: D. A byte is 8 bits: 2^8 = 256 patterns, for example the naturals from 0 to 255.
 2. Answer: B. 0xF81F = 11111 000000 11111: red and blue at maximum, green at zero: magenta.</a:t>
             </a:r>
@@ -1380,8 +1380,8 @@
           <a:p>
             <a:r>
               <a:rPr lang="en-US" dirty="0"/>
-              <a:t>Count the characters and remember what the z of .asciz adds. The directive stores the string zero-terminated: one more byte than the visible characters.
-RISC-V is little-endian. Write the word as four bytes, 00 00 AB CD, from the most to the least significant, and ask which one goes at the lowest address. The trap is 0x00, which would be right on a big-endian machine.
+              <a:t>For the first question the characters are counted and the meaning of the z in .asciz recalled: the directive stores the string zero-terminated, adding one byte to the visible characters.
+For the second, RISC-V is little-endian. The word is written as four bytes, 00 00 AB CD, from most to least significant, and the question is which of them occupies the lowest address. The distractor is 0x00, which would be correct on a big-endian machine.
 For the lecturer: 1. Answer: C. Four characters plus the terminating zero byte.
 2. Answer: C. RISC-V is little-endian: the least significant byte, 0xCD, goes at the lowest address.</a:t>
             </a:r>
@@ -1471,7 +1471,7 @@
           <a:p>
             <a:r>
               <a:rPr lang="en-US" dirty="0"/>
-              <a:t>Twelve terms. Word is parola in Italian, and on RV32 it means thirty-two bits. Sampling and quantisation are the two operations of digitising. Byte order, or endianness, is the order of the bytes of a word in memory. Note that the Italian pila is the stack, while array is often left untranslated or rendered as vettore.</a:t>
+              <a:t>Twelve terms. Word is parola in Italian, and on RV32 denotes thirty-two bits. Sampling and quantisation are the two operations of digitisation. Byte order, or endianness, is the order in which the bytes of a word are stored. The Italian pila translates stack, while array is often left untranslated or rendered as vettore.</a:t>
             </a:r>
             <a:endParaRPr lang="en-US" dirty="0"/>
           </a:p>
@@ -1559,7 +1559,7 @@
           <a:p>
             <a:r>
               <a:rPr lang="en-US" dirty="0"/>
-              <a:t>Six objectives, from the general to the particular and back. You will tell analog from digital, read a byte in binary and in hexadecimal, decode a PRG32 colour into its three fields, say how text is stored, and describe how an array lives in memory and how assembly reaches one of its elements. The last objective looks beyond the machine: what an algorithm is, when it is deterministic, and where machine learning fits.</a:t>
+              <a:t>Six learning outcomes, moving from the general to the particular and back. The student will distinguish analog from digital information, read a byte in binary and in hexadecimal, decode a PRG32 colour into its three fields, explain how text is stored, and describe how an array is laid out in memory and how assembly accesses one of its elements. The final outcome looks beyond the machine: what an algorithm is, when it is deterministic, and where machine learning belongs among algorithms.</a:t>
             </a:r>
             <a:endParaRPr lang="en-US" dirty="0"/>
           </a:p>
@@ -1647,7 +1647,7 @@
           <a:p>
             <a:r>
               <a:rPr lang="en-US" dirty="0"/>
-              <a:t>Five sentences to keep. Digital information is a pattern of bits plus a convention for reading it. The same bits can be a number, a colour or two characters: the program decides. Hexadecimal is binary written compactly, four bits per digit. Text is numbers, and structures are bytes plus a rule. Algorithms turn data into information on which decisions can be based. The next lecture treats the representation of numbers formally, starting from a marker that walks off the left edge of the screen.
+              <a:t>Five propositions summarise the lecture. Digital information is a pattern of bits together with a convention for reading it. The same bits may be a number, a colour or two characters, and the program decides which. Hexadecimal is binary in compact form, four bits per digit. Text consists of numbers, and data structures of bytes plus a rule. Algorithms transform data into information on which decisions can be based. The next lecture treats the representation of numbers formally, beginning with a marker that walks off the left edge of the screen.
 Learning status, recap. UNDERSTAND NOW: analog and digital; bit, byte, word; hexadecimal; positional notation; a colour is a number; characters and strings; little-endian byte order; data structures; arrays in memory; algorithms. USE NOW: shifts as multiplications (Lecture 05) and, used without being studied in this course, the complete program, the PRG32 tools. UNDERSTAND LATER: nothing. A slide without a badge is context: a story, an example, a question, an exercise.
 For the lecturer: Next lecture: number representation, formally.</a:t>
             </a:r>
@@ -1737,7 +1737,7 @@
           <a:p>
             <a:r>
               <a:rPr lang="en-US" dirty="0"/>
-              <a:t>An analog quantity varies continuously, like a voltage or the hands of a watch. A digital quantity is a sequence of symbols from a finite alphabet, like the digits of a display. In the figure the smooth curve is the analog signal; the staircase is its digital version, obtained by sampling at regular instants and quantising each sample to one of a few levels. Something is lost, and something is gained: a finite number of levels can be counted, copied without error and checked. With two levels only, the symbol is the bit.
+              <a:t>An analog quantity varies continuously, as a voltage or the hands of a watch do. A digital quantity is a sequence of symbols drawn from a finite alphabet, as the digits of a display are. In the figure the smooth curve is the analog signal and the staircase is its digital counterpart, obtained by sampling at regular instants and quantising each sample to one of a finite number of levels. Something is lost in the process, and something essential is gained: a finite set of levels can be counted, copied without error and checked. With only two levels, the symbol is the bit, and Lecture 10 will show why two levels are preferred.
 UNDERSTAND NOW: analog and digital.
 For the lecturer: Two levels are easy to build reliably with transistors (off or on), which is why computers are binary. Boolean algebra (Lecture 08) is the mathematics of two levels.</a:t>
             </a:r>
@@ -1827,7 +1827,7 @@
           <a:p>
             <a:r>
               <a:rPr lang="en-US" dirty="0"/>
-              <a:t>The units of information, each tied to something you have used. A bit is one button. A nibble, four bits, is one hexadecimal digit. A byte, eight bits, is one ASCII character, and it is the reason why the bar of Lecture 02 was at most 255 wide. A halfword, sixteen bits, is one colour. A word, thirty-two bits, is one register and one instruction. The rule to remember: n bits give 2 to the n patterns. And the caption: what a pattern means is not written in the bits.
+              <a:t>The units of information, each tied to an object already encountered. A bit is one button. A nibble, four bits, is one hexadecimal digit. A byte, eight bits, is one ASCII character, and it is the reason why the bar of Lecture 02 never exceeded 255 pixels. A halfword, sixteen bits, is one PRG32 colour. A word, thirty-two bits, is one register and one instruction. The governing rule is that n bits yield 2^n distinct patterns. The caption adds the principle of the lecture: what a pattern means is not written in the bits.
 UNDERSTAND NOW: bit, byte, word.
 For the lecturer: n bits give 2^n distinct patterns. What a pattern means is not written in the bits: it is a convention between whoever writes them and whoever reads them. On RV32 a word is 32 bits by definition of the architecture.</a:t>
             </a:r>
@@ -1917,7 +1917,7 @@
           <a:p>
             <a:r>
               <a:rPr lang="en-US" dirty="0"/>
-              <a:t>Sixteen rows to learn by heart, as you once learned the multiplication tables. Each row gives the same number in decimal, in binary with four bits, and in hexadecimal with one digit. The four binary columns weigh 8, 4, 2 and 1: 1011 is 8 + 2 + 1 = 11, which hexadecimal writes B. After 9 the hexadecimal digits continue with the letters A to F for the values ten to fifteen. Cover two columns and reconstruct them from the third until you no longer need to think.
+              <a:t>Sixteen rows to be learned by heart, as multiplication tables once were. Each row gives the same number in decimal, in four-bit binary and as a single hexadecimal digit. The four binary positions weigh 8, 4, 2 and 1, so 1011 is 8 + 2 + 1 = 11, which hexadecimal writes as B; after 9, the hexadecimal digits continue with the letters A to F for the values ten to fifteen. Fluency matters more than understanding here, since the understanding is simple: covering two columns and reconstructing them from the third, until no thought is required, is the recommended exercise.
 UNDERSTAND NOW: hexadecimal.
 For the lecturer: The columns of the binary number weigh 8, 4, 2, 1. Learn this table by heart: it is the multiplication table of this course.</a:t>
             </a:r>
@@ -2007,7 +2007,7 @@
           <a:p>
             <a:r>
               <a:rPr lang="en-US" dirty="0"/>
-              <a:t>In a positional system a digit is worth its value times the weight of its position, and the weights are the powers of the base. The slide reads the byte 11011001 this way: the positions weigh 128, 64, 32, 16, 8, 4, 2 and 1; where the bit is 1 the weight is added, where it is 0 it is not. The sum is 128 + 64 + 16 + 8 + 1 = 217. It is exactly what you do in base ten without noticing: 217 is 2 hundreds, 1 ten and 7 units.
+              <a:t>In a positional system each digit contributes its value multiplied by the weight of its position, and the weights are successive powers of the base. The slide reads the byte 11011001 in this way: the positions weigh 128, 64, 32, 16, 8, 4, 2 and 1, and the weight is added wherever the bit is 1. The sum is 128 + 64 + 16 + 8 + 1 = 217. This is precisely the procedure applied unconsciously in base ten, where 217 denotes two hundreds, one ten and seven units. Lecture 05 states the general formula and the conversion algorithms.
 UNDERSTAND NOW: positional notation.
 For the lecturer: Lecture 05 gives the general formula and the conversion algorithms. Here the aim is only to read a byte.</a:t>
             </a:r>
@@ -2097,7 +2097,7 @@
           <a:p>
             <a:r>
               <a:rPr lang="en-US" dirty="0"/>
-              <a:t>Sixteen is two to the fourth power, so one hexadecimal digit corresponds to exactly four bits. To convert, cut the binary number into groups of four from the right and replace each group using the table: 0000 0111 1110 0000 becomes 0, 7, E, 0. No arithmetic is needed. This is why programmers use hexadecimal: it is binary written compactly. A register is eight hexadecimal digits instead of thirty-two bits. The prefix 0x announces that a number is hexadecimal.
+              <a:t>Since sixteen is two to the fourth power, each hexadecimal digit corresponds to exactly four bits. Conversion therefore requires no arithmetic: the binary number is divided into groups of four bits from the right, and each group replaced by its digit from the table, so that 0000 0111 1110 0000 becomes 0, 7, E, 0. This is why programmers write hexadecimal: it is binary in compact form, with a register occupying eight hexadecimal digits instead of thirty-two bits. The prefix 0x marks a number as hexadecimal.
 UNDERSTAND NOW: hexadecimal.
 For the lecturer: 0x07E0 = 7 x 256 + 14 x 16 = 1792 + 224 = 2016. The decimal value is useless here: the bit pattern is the point, as the next slide shows.</a:t>
             </a:r>
@@ -2187,7 +2187,7 @@
           <a:p>
             <a:r>
               <a:rPr lang="en-US" dirty="0"/>
-              <a:t>Here the green of Lecture 02 is opened. A PRG32 colour is sixteen bits divided into three fields: five bits of red, six of green, five of blue. The format is called RGB565. In 0x07E0 the red field is 00000, the green field is 111111 and the blue field is 00000: maximum green and nothing else. The eight swatches show other combinations: yellow is red plus green, white is everything. The sentence at the bottom is the lesson of the whole lecture: the same sixteen bits could be something else entirely.
+              <a:t>Here the green of Lecture 02 is opened up. A PRG32 colour is a sixteen-bit quantity divided into three fields: five bits of red, six of green, five of blue, a format known as RGB565. In 0x07E0 the red field is 00000, the green field 111111 and the blue field 00000: maximum green and nothing else. The extra bit given to green reflects the greater sensitivity of human vision to that component. The eight swatches show other combinations: yellow is red plus green, white is every field at its maximum. The sentence at the bottom restates the lesson of the lecture: the same sixteen bits could mean something else entirely.
 UNDERSTAND NOW: a colour is a number.
 For the lecturer: The eye is most sensitive to green, which is why green gets the extra bit. Exercise: which colour is 0xF81F? (red and blue at maximum: magenta). The colour constants are those of prg32.h.</a:t>
             </a:r>
@@ -2277,7 +2277,7 @@
           <a:p>
             <a:r>
               <a:rPr lang="en-US" dirty="0"/>
-              <a:t>ASCII assigns a number to each character and fits it in one byte. Three observations from the table. The capital A is 65 and the small a is 97: they differ by 32, that is by a single bit. The character "0" is 48, not zero: a digit typed on a keyboard is not yet a number. And there are characters that do not print: the newline, 10, and NUL, 0, which you will meet on the next slide as the end of a string.
+              <a:t>ASCII assigns a number to each character and fits it within one byte. Three observations follow from the table. The capital A is 65 and the small a is 97: they differ by 32, that is, by a single bit, which makes case conversion a bitwise operation. The character "0" is 48, not zero: a digit typed on a keyboard is a code, not yet a number, a distinction that Lecture 22 exploits when it converts a score into text. And some characters do not print: the newline, 10, and NUL, 0, which the next slide uses as the terminator of a string.
 UNDERSTAND NOW: characters and strings.
 For the lecturer: ASCII (1963) uses 7 bits: 128 characters, English only. Upper and lower case differ only in bit 5: xori with 0x20 switches case, a first taste of Boolean algebra on text.</a:t>
             </a:r>
@@ -3357,7 +3357,7 @@
                 <a:ea typeface="Calibri" pitchFamily="34" charset="-122"/>
                 <a:cs typeface="Calibri" pitchFamily="34" charset="-120"/>
               </a:rPr>
-              <a:t>04-Computer_Architecture-Digital_Information-Code.pptx</a:t>
+              <a:t>04-Computer_Architecture-Digital_Information-Lab.pptx</a:t>
             </a:r>
             <a:endParaRPr lang="en-US" sz="1300" dirty="0"/>
           </a:p>

--- a/en/slides/04-Computer_Architecture-Digital_Information.pptx
+++ b/en/slides/04-Computer_Architecture-Digital_Information.pptx
@@ -126,13 +126,13 @@
   <p:extLst>
     <p:ext uri="{521415D9-36F7-43E2-AB2F-B90AF26B5E84}">
       <p14:sectionLst xmlns:p14="http://schemas.microsoft.com/office/powerpoint/2010/main">
-        <p14:section name="Opening" id="{a4d71d49-6c0d-7e06-6207-0d8d4c7ae1fd}">
+        <p14:section name="Opening" id="{ab368d0d-756b-c54c-b971-8faf2b2a15a0}">
           <p14:sldIdLst>
             <p14:sldId id="256"/>
             <p14:sldId id="257"/>
           </p14:sldIdLst>
         </p14:section>
-        <p14:section name="Information" id="{4310f838-6dc9-2a10-a85d-83afeb74bf96}">
+        <p14:section name="Information" id="{3e299b4f-4165-8edd-0d9a-9d2e0d4db69d}">
           <p14:sldIdLst>
             <p14:sldId id="258"/>
             <p14:sldId id="259"/>
@@ -142,7 +142,7 @@
             <p14:sldId id="263"/>
           </p14:sldIdLst>
         </p14:section>
-        <p14:section name="Text" id="{e26dc81c-f826-3a8c-f555-84e207cbda76}">
+        <p14:section name="Text" id="{9cb2847e-0891-b7f4-4fe5-d6df0f845f19}">
           <p14:sldIdLst>
             <p14:sldId id="264"/>
             <p14:sldId id="265"/>
@@ -150,12 +150,12 @@
             <p14:sldId id="267"/>
           </p14:sldIdLst>
         </p14:section>
-        <p14:section name="Data structures" id="{0ddb3583-0fe7-cf98-4070-c8e64ec490af}">
+        <p14:section name="Data structures" id="{a453862c-f7db-6e1a-4595-17bc347026cc}">
           <p14:sldIdLst>
             <p14:sldId id="268"/>
           </p14:sldIdLst>
         </p14:section>
-        <p14:section name="Data and algorithms" id="{57b554ee-66c5-77ea-4780-7cc5dfe6a9ac}">
+        <p14:section name="Data and algorithms" id="{8b892818-93ec-ec3d-e676-40174a28fa07}">
           <p14:sldIdLst>
             <p14:sldId id="269"/>
             <p14:sldId id="270"/>

--- a/en/slides/04-Computer_Architecture-Digital_Information.pptx
+++ b/en/slides/04-Computer_Architecture-Digital_Information.pptx
@@ -126,13 +126,13 @@
   <p:extLst>
     <p:ext uri="{521415D9-36F7-43E2-AB2F-B90AF26B5E84}">
       <p14:sectionLst xmlns:p14="http://schemas.microsoft.com/office/powerpoint/2010/main">
-        <p14:section name="Opening" id="{ab368d0d-756b-c54c-b971-8faf2b2a15a0}">
+        <p14:section name="Opening" id="{f6205dc0-7ef6-555a-33cb-3162603c5062}">
           <p14:sldIdLst>
             <p14:sldId id="256"/>
             <p14:sldId id="257"/>
           </p14:sldIdLst>
         </p14:section>
-        <p14:section name="Information" id="{3e299b4f-4165-8edd-0d9a-9d2e0d4db69d}">
+        <p14:section name="Information" id="{8ec78156-1e6f-81b6-d106-e359e927e1a6}">
           <p14:sldIdLst>
             <p14:sldId id="258"/>
             <p14:sldId id="259"/>
@@ -142,7 +142,7 @@
             <p14:sldId id="263"/>
           </p14:sldIdLst>
         </p14:section>
-        <p14:section name="Text" id="{9cb2847e-0891-b7f4-4fe5-d6df0f845f19}">
+        <p14:section name="Text" id="{65c70473-1549-8c5e-19dc-2da5fcb1ba41}">
           <p14:sldIdLst>
             <p14:sldId id="264"/>
             <p14:sldId id="265"/>
@@ -150,12 +150,12 @@
             <p14:sldId id="267"/>
           </p14:sldIdLst>
         </p14:section>
-        <p14:section name="Data structures" id="{a453862c-f7db-6e1a-4595-17bc347026cc}">
+        <p14:section name="Data structures" id="{f668c0fe-202e-4992-656a-9cddba4f5626}">
           <p14:sldIdLst>
             <p14:sldId id="268"/>
           </p14:sldIdLst>
         </p14:section>
-        <p14:section name="Data and algorithms" id="{8b892818-93ec-ec3d-e676-40174a28fa07}">
+        <p14:section name="Data and algorithms" id="{fa24f87b-7f11-b239-0887-d4a7ccdd8b35}">
           <p14:sldIdLst>
             <p14:sldId id="269"/>
             <p14:sldId id="270"/>
@@ -573,6 +573,8 @@
               <a:t>In Lecture 02 the student wrote 0x07e0, 255, .asciz and .word without knowing precisely what they denoted. This lecture names them. Its thesis is stated in the subtitle: everything inside the machine is a pattern of bits, whether a number, a colour, a letter or a list, and the meaning of a pattern is fixed by convention, not by the bits themselves. The lecture favours breadth over depth: the representation of numbers is treated formally in the next two lectures, while here the aim is to learn to read bits and to recognise that interpretation is an agreement.
 Learning status: UNDERSTAND NOW, by the end of this lecture you explain it, trace it and apply it on your own; USE NOW, you follow and use the recipe today; how it works inside is explained later, or is not part of the course; UNDERSTAND LATER, recognise the name and what it is for; a later lecture explains it. A slide without a badge is context: a story, an example, a question, an exercise.
 Learning status of this lecture. UNDERSTAND NOW: analog and digital; bit, byte, word; hexadecimal; positional notation; a colour is a number; characters and strings; little-endian byte order; data structures; arrays in memory; algorithms. USE NOW: shifts as multiplications (Lecture 05) and, used without being studied in this course, the complete program, the PRG32 tools. UNDERSTAND LATER: nothing. A slide without a badge is context: a story, an example, a question, an exercise.
+Roadmap. Today's outcomes: (1) distinguish analog from digital information and count the values that n bits can represent; (2) encode numbers, colours and text as bits: positional notation, hexadecimal, RGB565, ASCII; (3) name the basic data structures and the properties of an algorithm. Builds on: only what Lecture 01 set up. Next: Lecture 05, Number Representation: Integers.
+Bridge. In Lecture 02 the instruction addi t1, t1, 1 appeared in memory as the word 0x00130313. Today the same 32 bits can be read as a number, a colour, four letters or an instruction: the code decides. Lecture 19 reads the instruction field by field. Recall: Name two different things one 32-bit word can mean, and what decides which meaning applies.
 For the lecturer: Spiral: the students have already seen 0x07e0, 255, .asciz and .word in Lecture 02. This lecture names what those were. The next two lectures (05, 06) treat numbers formally.</a:t>
             </a:r>
             <a:endParaRPr lang="en-US" dirty="0"/>
@@ -1648,7 +1650,7 @@
             <a:r>
               <a:rPr lang="en-US" dirty="0"/>
               <a:t>Five propositions summarise the lecture. Digital information is a pattern of bits together with a convention for reading it. The same bits may be a number, a colour or two characters, and the program decides which. Hexadecimal is binary in compact form, four bits per digit. Text consists of numbers, and data structures of bytes plus a rule. Algorithms transform data into information on which decisions can be based. The next lecture treats the representation of numbers formally, beginning with a marker that walks off the left edge of the screen.
-Learning status, recap. UNDERSTAND NOW: analog and digital; bit, byte, word; hexadecimal; positional notation; a colour is a number; characters and strings; little-endian byte order; data structures; arrays in memory; algorithms. USE NOW: shifts as multiplications (Lecture 05) and, used without being studied in this course, the complete program, the PRG32 tools. UNDERSTAND LATER: nothing. A slide without a badge is context: a story, an example, a question, an exercise.
+Learning status, recap. UNDERSTAND NOW: analog and digital; bit, byte, word; hexadecimal; positional notation; a colour is a number; characters and strings; little-endian byte order; data structures; arrays in memory; algorithms. USE NOW: shifts as multiplications (Lecture 05) and, used without being studied in this course, the complete program, the PRG32 tools. UNDERSTAND LATER: nothing. A slide without a badge is context: a story, an example, a question, an exercise. Closing thread: Bits mean nothing by themselves: a code gives them a meaning, and the same 32 bits can be a number, a colour, four letters or an instruction. Next: the codes for integers, and what happens when they run out of bits. Exit ticket (two to four minutes, alone, on paper): 1. A mercury thermometer and a display that shows 21.5 both measure temperature. Which is analog and which digital? Why can the digital reading be copied a thousand times without getting worse? 2. The Undo button of an editor cancels the most recent change first, then the one before. Which of the five data structures fits, and why not an array reached by index?
 For the lecturer: Next lecture: number representation, formally.</a:t>
             </a:r>
             <a:endParaRPr lang="en-US" dirty="0"/>
